--- a/meeting/RDTI牛文涛250516.pptx
+++ b/meeting/RDTI牛文涛250516.pptx
@@ -123,6 +123,11 @@
       </a:defRPr>
     </a:lvl9pPr>
   </p:defaultTextStyle>
+  <p:extLst>
+    <p:ext uri="{EFAFB233-063F-42B5-8137-9DF3F51BA10A}">
+      <p15:sldGuideLst xmlns:p15="http://schemas.microsoft.com/office/powerpoint/2012/main"/>
+    </p:ext>
+  </p:extLst>
 </p:presentation>
 </file>
 
@@ -208,7 +213,7 @@
           <a:p>
             <a:fld id="{128F3AD1-9F68-4520-8DA3-E90BF3ADF08C}" type="datetimeFigureOut">
               <a:rPr lang="zh-CN" altLang="en-US" smtClean="0"/>
-              <a:t>2025/5/14</a:t>
+              <a:t>2025/6/4</a:t>
             </a:fld>
             <a:endParaRPr lang="zh-CN" altLang="en-US"/>
           </a:p>
@@ -1452,8 +1457,8 @@
         </p:nvSpPr>
         <p:spPr/>
       </p:sp>
-      <mc:AlternateContent xmlns:mc="http://schemas.openxmlformats.org/markup-compatibility/2006">
-        <mc:Choice xmlns:a14="http://schemas.microsoft.com/office/drawing/2010/main" Requires="a14">
+      <mc:AlternateContent xmlns:mc="http://schemas.openxmlformats.org/markup-compatibility/2006" xmlns:a14="http://schemas.microsoft.com/office/drawing/2010/main">
+        <mc:Choice Requires="a14">
           <p:sp>
             <p:nvSpPr>
               <p:cNvPr id="3" name="备注占位符 2"/>
@@ -1733,7 +1738,7 @@
             </p:txBody>
           </p:sp>
         </mc:Choice>
-        <mc:Fallback>
+        <mc:Fallback xmlns="">
           <p:sp>
             <p:nvSpPr>
               <p:cNvPr id="3" name="备注占位符 2"/>
@@ -2605,7 +2610,7 @@
           <a:p>
             <a:fld id="{DBD0F83E-52B0-4FA7-AE66-001D928785BF}" type="datetimeFigureOut">
               <a:rPr lang="zh-CN" altLang="en-US" smtClean="0"/>
-              <a:t>2025/5/14</a:t>
+              <a:t>2025/6/4</a:t>
             </a:fld>
             <a:endParaRPr lang="zh-CN" altLang="en-US"/>
           </a:p>
@@ -2803,7 +2808,7 @@
           <a:p>
             <a:fld id="{DBD0F83E-52B0-4FA7-AE66-001D928785BF}" type="datetimeFigureOut">
               <a:rPr lang="zh-CN" altLang="en-US" smtClean="0"/>
-              <a:t>2025/5/14</a:t>
+              <a:t>2025/6/4</a:t>
             </a:fld>
             <a:endParaRPr lang="zh-CN" altLang="en-US"/>
           </a:p>
@@ -3011,7 +3016,7 @@
           <a:p>
             <a:fld id="{DBD0F83E-52B0-4FA7-AE66-001D928785BF}" type="datetimeFigureOut">
               <a:rPr lang="zh-CN" altLang="en-US" smtClean="0"/>
-              <a:t>2025/5/14</a:t>
+              <a:t>2025/6/4</a:t>
             </a:fld>
             <a:endParaRPr lang="zh-CN" altLang="en-US"/>
           </a:p>
@@ -3209,7 +3214,7 @@
           <a:p>
             <a:fld id="{DBD0F83E-52B0-4FA7-AE66-001D928785BF}" type="datetimeFigureOut">
               <a:rPr lang="zh-CN" altLang="en-US" smtClean="0"/>
-              <a:t>2025/5/14</a:t>
+              <a:t>2025/6/4</a:t>
             </a:fld>
             <a:endParaRPr lang="zh-CN" altLang="en-US"/>
           </a:p>
@@ -3484,7 +3489,7 @@
           <a:p>
             <a:fld id="{DBD0F83E-52B0-4FA7-AE66-001D928785BF}" type="datetimeFigureOut">
               <a:rPr lang="zh-CN" altLang="en-US" smtClean="0"/>
-              <a:t>2025/5/14</a:t>
+              <a:t>2025/6/4</a:t>
             </a:fld>
             <a:endParaRPr lang="zh-CN" altLang="en-US"/>
           </a:p>
@@ -3749,7 +3754,7 @@
           <a:p>
             <a:fld id="{DBD0F83E-52B0-4FA7-AE66-001D928785BF}" type="datetimeFigureOut">
               <a:rPr lang="zh-CN" altLang="en-US" smtClean="0"/>
-              <a:t>2025/5/14</a:t>
+              <a:t>2025/6/4</a:t>
             </a:fld>
             <a:endParaRPr lang="zh-CN" altLang="en-US"/>
           </a:p>
@@ -4161,7 +4166,7 @@
           <a:p>
             <a:fld id="{DBD0F83E-52B0-4FA7-AE66-001D928785BF}" type="datetimeFigureOut">
               <a:rPr lang="zh-CN" altLang="en-US" smtClean="0"/>
-              <a:t>2025/5/14</a:t>
+              <a:t>2025/6/4</a:t>
             </a:fld>
             <a:endParaRPr lang="zh-CN" altLang="en-US"/>
           </a:p>
@@ -4302,7 +4307,7 @@
           <a:p>
             <a:fld id="{DBD0F83E-52B0-4FA7-AE66-001D928785BF}" type="datetimeFigureOut">
               <a:rPr lang="zh-CN" altLang="en-US" smtClean="0"/>
-              <a:t>2025/5/14</a:t>
+              <a:t>2025/6/4</a:t>
             </a:fld>
             <a:endParaRPr lang="zh-CN" altLang="en-US"/>
           </a:p>
@@ -4415,7 +4420,7 @@
           <a:p>
             <a:fld id="{DBD0F83E-52B0-4FA7-AE66-001D928785BF}" type="datetimeFigureOut">
               <a:rPr lang="zh-CN" altLang="en-US" smtClean="0"/>
-              <a:t>2025/5/14</a:t>
+              <a:t>2025/6/4</a:t>
             </a:fld>
             <a:endParaRPr lang="zh-CN" altLang="en-US"/>
           </a:p>
@@ -4726,7 +4731,7 @@
           <a:p>
             <a:fld id="{DBD0F83E-52B0-4FA7-AE66-001D928785BF}" type="datetimeFigureOut">
               <a:rPr lang="zh-CN" altLang="en-US" smtClean="0"/>
-              <a:t>2025/5/14</a:t>
+              <a:t>2025/6/4</a:t>
             </a:fld>
             <a:endParaRPr lang="zh-CN" altLang="en-US"/>
           </a:p>
@@ -5014,7 +5019,7 @@
           <a:p>
             <a:fld id="{DBD0F83E-52B0-4FA7-AE66-001D928785BF}" type="datetimeFigureOut">
               <a:rPr lang="zh-CN" altLang="en-US" smtClean="0"/>
-              <a:t>2025/5/14</a:t>
+              <a:t>2025/6/4</a:t>
             </a:fld>
             <a:endParaRPr lang="zh-CN" altLang="en-US"/>
           </a:p>
@@ -5255,7 +5260,7 @@
           <a:p>
             <a:fld id="{DBD0F83E-52B0-4FA7-AE66-001D928785BF}" type="datetimeFigureOut">
               <a:rPr lang="zh-CN" altLang="en-US" smtClean="0"/>
-              <a:t>2025/5/14</a:t>
+              <a:t>2025/6/4</a:t>
             </a:fld>
             <a:endParaRPr lang="zh-CN" altLang="en-US"/>
           </a:p>
@@ -6235,8 +6240,8 @@
           </a:prstGeom>
         </p:spPr>
       </p:pic>
-      <mc:AlternateContent xmlns:mc="http://schemas.openxmlformats.org/markup-compatibility/2006">
-        <mc:Choice xmlns:a14="http://schemas.microsoft.com/office/drawing/2010/main" Requires="a14">
+      <mc:AlternateContent xmlns:mc="http://schemas.openxmlformats.org/markup-compatibility/2006" xmlns:a14="http://schemas.microsoft.com/office/drawing/2010/main">
+        <mc:Choice Requires="a14">
           <p:sp>
             <p:nvSpPr>
               <p:cNvPr id="6" name="文本框 5">
@@ -6286,7 +6291,7 @@
             </p:txBody>
           </p:sp>
         </mc:Choice>
-        <mc:Fallback>
+        <mc:Fallback xmlns="">
           <p:sp>
             <p:nvSpPr>
               <p:cNvPr id="6" name="文本框 5">
@@ -6815,8 +6820,8 @@
           </a:fontRef>
         </p:style>
       </p:cxnSp>
-      <mc:AlternateContent xmlns:mc="http://schemas.openxmlformats.org/markup-compatibility/2006">
-        <mc:Choice xmlns:a14="http://schemas.microsoft.com/office/drawing/2010/main" Requires="a14">
+      <mc:AlternateContent xmlns:mc="http://schemas.openxmlformats.org/markup-compatibility/2006" xmlns:a14="http://schemas.microsoft.com/office/drawing/2010/main">
+        <mc:Choice Requires="a14">
           <p:sp>
             <p:nvSpPr>
               <p:cNvPr id="37" name="文本框 36">
@@ -6984,7 +6989,7 @@
             </p:txBody>
           </p:sp>
         </mc:Choice>
-        <mc:Fallback>
+        <mc:Fallback xmlns="">
           <p:sp>
             <p:nvSpPr>
               <p:cNvPr id="37" name="文本框 36">
@@ -7147,8 +7152,8 @@
           </a:p>
         </p:txBody>
       </p:sp>
-      <mc:AlternateContent xmlns:mc="http://schemas.openxmlformats.org/markup-compatibility/2006">
-        <mc:Choice xmlns:a14="http://schemas.microsoft.com/office/drawing/2010/main" Requires="a14">
+      <mc:AlternateContent xmlns:mc="http://schemas.openxmlformats.org/markup-compatibility/2006" xmlns:a14="http://schemas.microsoft.com/office/drawing/2010/main">
+        <mc:Choice Requires="a14">
           <p:sp>
             <p:nvSpPr>
               <p:cNvPr id="4" name="文本框 3">
@@ -7340,7 +7345,7 @@
             </p:txBody>
           </p:sp>
         </mc:Choice>
-        <mc:Fallback>
+        <mc:Fallback xmlns="">
           <p:sp>
             <p:nvSpPr>
               <p:cNvPr id="4" name="文本框 3">
@@ -7385,8 +7390,8 @@
           </p:sp>
         </mc:Fallback>
       </mc:AlternateContent>
-      <mc:AlternateContent xmlns:mc="http://schemas.openxmlformats.org/markup-compatibility/2006">
-        <mc:Choice xmlns:a14="http://schemas.microsoft.com/office/drawing/2010/main" Requires="a14">
+      <mc:AlternateContent xmlns:mc="http://schemas.openxmlformats.org/markup-compatibility/2006" xmlns:a14="http://schemas.microsoft.com/office/drawing/2010/main">
+        <mc:Choice Requires="a14">
           <p:sp>
             <p:nvSpPr>
               <p:cNvPr id="7" name="文本框 6">
@@ -7551,7 +7556,7 @@
             </p:txBody>
           </p:sp>
         </mc:Choice>
-        <mc:Fallback>
+        <mc:Fallback xmlns="">
           <p:sp>
             <p:nvSpPr>
               <p:cNvPr id="7" name="文本框 6">
@@ -7634,8 +7639,8 @@
           </a:p>
         </p:txBody>
       </p:sp>
-      <mc:AlternateContent xmlns:mc="http://schemas.openxmlformats.org/markup-compatibility/2006">
-        <mc:Choice xmlns:a14="http://schemas.microsoft.com/office/drawing/2010/main" Requires="a14">
+      <mc:AlternateContent xmlns:mc="http://schemas.openxmlformats.org/markup-compatibility/2006" xmlns:a14="http://schemas.microsoft.com/office/drawing/2010/main">
+        <mc:Choice Requires="a14">
           <p:sp>
             <p:nvSpPr>
               <p:cNvPr id="12" name="文本框 11">
@@ -7664,6 +7669,7 @@
               </a:bodyPr>
               <a:lstStyle/>
               <a:p>
+                <a:pPr/>
                 <a14:m>
                   <m:oMathPara xmlns:m="http://schemas.openxmlformats.org/officeDocument/2006/math">
                     <m:oMathParaPr>
@@ -7886,7 +7892,7 @@
             </p:txBody>
           </p:sp>
         </mc:Choice>
-        <mc:Fallback>
+        <mc:Fallback xmlns="">
           <p:sp>
             <p:nvSpPr>
               <p:cNvPr id="12" name="文本框 11">
@@ -8006,8 +8012,8 @@
           </a:p>
         </p:txBody>
       </p:sp>
-      <mc:AlternateContent xmlns:mc="http://schemas.openxmlformats.org/markup-compatibility/2006">
-        <mc:Choice xmlns:a14="http://schemas.microsoft.com/office/drawing/2010/main" Requires="a14">
+      <mc:AlternateContent xmlns:mc="http://schemas.openxmlformats.org/markup-compatibility/2006" xmlns:a14="http://schemas.microsoft.com/office/drawing/2010/main">
+        <mc:Choice Requires="a14">
           <p:sp>
             <p:nvSpPr>
               <p:cNvPr id="18" name="文本框 17">
@@ -8036,7 +8042,6 @@
               </a:bodyPr>
               <a:lstStyle/>
               <a:p>
-                <a:pPr/>
                 <a14:m>
                   <m:oMath xmlns:m="http://schemas.openxmlformats.org/officeDocument/2006/math">
                     <m:sSub>
@@ -8166,7 +8171,7 @@
             </p:txBody>
           </p:sp>
         </mc:Choice>
-        <mc:Fallback>
+        <mc:Fallback xmlns="">
           <p:sp>
             <p:nvSpPr>
               <p:cNvPr id="18" name="文本框 17">
@@ -8211,8 +8216,8 @@
           </p:sp>
         </mc:Fallback>
       </mc:AlternateContent>
-      <mc:AlternateContent xmlns:mc="http://schemas.openxmlformats.org/markup-compatibility/2006">
-        <mc:Choice xmlns:a14="http://schemas.microsoft.com/office/drawing/2010/main" Requires="a14">
+      <mc:AlternateContent xmlns:mc="http://schemas.openxmlformats.org/markup-compatibility/2006" xmlns:a14="http://schemas.microsoft.com/office/drawing/2010/main">
+        <mc:Choice Requires="a14">
           <p:sp>
             <p:nvSpPr>
               <p:cNvPr id="23" name="文本框 22">
@@ -8241,7 +8246,6 @@
               </a:bodyPr>
               <a:lstStyle/>
               <a:p>
-                <a:pPr/>
                 <a14:m>
                   <m:oMath xmlns:m="http://schemas.openxmlformats.org/officeDocument/2006/math">
                     <m:sSubSup>
@@ -8494,7 +8498,7 @@
             </p:txBody>
           </p:sp>
         </mc:Choice>
-        <mc:Fallback>
+        <mc:Fallback xmlns="">
           <p:sp>
             <p:nvSpPr>
               <p:cNvPr id="23" name="文本框 22">
@@ -8616,8 +8620,8 @@
           </a:p>
         </p:txBody>
       </p:sp>
-      <mc:AlternateContent xmlns:mc="http://schemas.openxmlformats.org/markup-compatibility/2006">
-        <mc:Choice xmlns:a14="http://schemas.microsoft.com/office/drawing/2010/main" Requires="a14">
+      <mc:AlternateContent xmlns:mc="http://schemas.openxmlformats.org/markup-compatibility/2006" xmlns:a14="http://schemas.microsoft.com/office/drawing/2010/main">
+        <mc:Choice Requires="a14">
           <p:sp>
             <p:nvSpPr>
               <p:cNvPr id="39" name="文本框 38">
@@ -8785,7 +8789,7 @@
             </p:txBody>
           </p:sp>
         </mc:Choice>
-        <mc:Fallback>
+        <mc:Fallback xmlns="">
           <p:sp>
             <p:nvSpPr>
               <p:cNvPr id="39" name="文本框 38">
@@ -8921,8 +8925,8 @@
           </a:p>
         </p:txBody>
       </p:sp>
-      <mc:AlternateContent xmlns:mc="http://schemas.openxmlformats.org/markup-compatibility/2006">
-        <mc:Choice xmlns:a14="http://schemas.microsoft.com/office/drawing/2010/main" Requires="a14">
+      <mc:AlternateContent xmlns:mc="http://schemas.openxmlformats.org/markup-compatibility/2006" xmlns:a14="http://schemas.microsoft.com/office/drawing/2010/main">
+        <mc:Choice Requires="a14">
           <p:sp>
             <p:nvSpPr>
               <p:cNvPr id="45" name="文本框 44">
@@ -9305,7 +9309,7 @@
             </p:txBody>
           </p:sp>
         </mc:Choice>
-        <mc:Fallback>
+        <mc:Fallback xmlns="">
           <p:sp>
             <p:nvSpPr>
               <p:cNvPr id="45" name="文本框 44">
@@ -9350,8 +9354,8 @@
           </p:sp>
         </mc:Fallback>
       </mc:AlternateContent>
-      <mc:AlternateContent xmlns:mc="http://schemas.openxmlformats.org/markup-compatibility/2006">
-        <mc:Choice xmlns:a14="http://schemas.microsoft.com/office/drawing/2010/main" Requires="a14">
+      <mc:AlternateContent xmlns:mc="http://schemas.openxmlformats.org/markup-compatibility/2006" xmlns:a14="http://schemas.microsoft.com/office/drawing/2010/main">
+        <mc:Choice Requires="a14">
           <p:sp>
             <p:nvSpPr>
               <p:cNvPr id="50" name="文本框 49">
@@ -9538,7 +9542,7 @@
             </p:txBody>
           </p:sp>
         </mc:Choice>
-        <mc:Fallback>
+        <mc:Fallback xmlns="">
           <p:sp>
             <p:nvSpPr>
               <p:cNvPr id="50" name="文本框 49">
@@ -9660,8 +9664,8 @@
           </a:p>
         </p:txBody>
       </p:sp>
-      <mc:AlternateContent xmlns:mc="http://schemas.openxmlformats.org/markup-compatibility/2006">
-        <mc:Choice xmlns:a14="http://schemas.microsoft.com/office/drawing/2010/main" Requires="a14">
+      <mc:AlternateContent xmlns:mc="http://schemas.openxmlformats.org/markup-compatibility/2006" xmlns:a14="http://schemas.microsoft.com/office/drawing/2010/main">
+        <mc:Choice Requires="a14">
           <p:sp>
             <p:nvSpPr>
               <p:cNvPr id="56" name="文本框 55">
@@ -9873,7 +9877,7 @@
             </p:txBody>
           </p:sp>
         </mc:Choice>
-        <mc:Fallback>
+        <mc:Fallback xmlns="">
           <p:sp>
             <p:nvSpPr>
               <p:cNvPr id="56" name="文本框 55">
@@ -10014,8 +10018,8 @@
           </a:prstGeom>
         </p:spPr>
       </p:pic>
-      <mc:AlternateContent xmlns:mc="http://schemas.openxmlformats.org/markup-compatibility/2006">
-        <mc:Choice xmlns:a14="http://schemas.microsoft.com/office/drawing/2010/main" Requires="a14">
+      <mc:AlternateContent xmlns:mc="http://schemas.openxmlformats.org/markup-compatibility/2006" xmlns:a14="http://schemas.microsoft.com/office/drawing/2010/main">
+        <mc:Choice Requires="a14">
           <p:sp>
             <p:nvSpPr>
               <p:cNvPr id="6" name="文本框 5">
@@ -10212,7 +10216,7 @@
             </p:txBody>
           </p:sp>
         </mc:Choice>
-        <mc:Fallback>
+        <mc:Fallback xmlns="">
           <p:sp>
             <p:nvSpPr>
               <p:cNvPr id="6" name="文本框 5">
@@ -10350,8 +10354,8 @@
           </a:p>
         </p:txBody>
       </p:sp>
-      <mc:AlternateContent xmlns:mc="http://schemas.openxmlformats.org/markup-compatibility/2006">
-        <mc:Choice xmlns:a14="http://schemas.microsoft.com/office/drawing/2010/main" Requires="a14">
+      <mc:AlternateContent xmlns:mc="http://schemas.openxmlformats.org/markup-compatibility/2006" xmlns:a14="http://schemas.microsoft.com/office/drawing/2010/main">
+        <mc:Choice Requires="a14">
           <p:sp>
             <p:nvSpPr>
               <p:cNvPr id="12" name="文本框 11">
@@ -10599,7 +10603,7 @@
             </p:txBody>
           </p:sp>
         </mc:Choice>
-        <mc:Fallback>
+        <mc:Fallback xmlns="">
           <p:sp>
             <p:nvSpPr>
               <p:cNvPr id="12" name="文本框 11">
@@ -10644,8 +10648,8 @@
           </p:sp>
         </mc:Fallback>
       </mc:AlternateContent>
-      <mc:AlternateContent xmlns:mc="http://schemas.openxmlformats.org/markup-compatibility/2006">
-        <mc:Choice xmlns:a14="http://schemas.microsoft.com/office/drawing/2010/main" Requires="a14">
+      <mc:AlternateContent xmlns:mc="http://schemas.openxmlformats.org/markup-compatibility/2006" xmlns:a14="http://schemas.microsoft.com/office/drawing/2010/main">
+        <mc:Choice Requires="a14">
           <p:sp>
             <p:nvSpPr>
               <p:cNvPr id="14" name="文本框 13">
@@ -10997,7 +11001,7 @@
             </p:txBody>
           </p:sp>
         </mc:Choice>
-        <mc:Fallback>
+        <mc:Fallback xmlns="">
           <p:sp>
             <p:nvSpPr>
               <p:cNvPr id="14" name="文本框 13">
@@ -11585,8 +11589,8 @@
           </a:p>
         </p:txBody>
       </p:sp>
-      <mc:AlternateContent xmlns:mc="http://schemas.openxmlformats.org/markup-compatibility/2006">
-        <mc:Choice xmlns:a14="http://schemas.microsoft.com/office/drawing/2010/main" Requires="a14">
+      <mc:AlternateContent xmlns:mc="http://schemas.openxmlformats.org/markup-compatibility/2006" xmlns:a14="http://schemas.microsoft.com/office/drawing/2010/main">
+        <mc:Choice Requires="a14">
           <p:sp>
             <p:nvSpPr>
               <p:cNvPr id="12" name="文本框 11">
@@ -11615,6 +11619,7 @@
               </a:bodyPr>
               <a:lstStyle/>
               <a:p>
+                <a:pPr/>
                 <a14:m>
                   <m:oMathPara xmlns:m="http://schemas.openxmlformats.org/officeDocument/2006/math">
                     <m:oMathParaPr>
@@ -11777,7 +11782,7 @@
             </p:txBody>
           </p:sp>
         </mc:Choice>
-        <mc:Fallback>
+        <mc:Fallback xmlns="">
           <p:sp>
             <p:nvSpPr>
               <p:cNvPr id="12" name="文本框 11">
@@ -12289,8 +12294,8 @@
           <a:chExt cx="0" cy="0"/>
         </a:xfrm>
       </p:grpSpPr>
-      <mc:AlternateContent xmlns:mc="http://schemas.openxmlformats.org/markup-compatibility/2006">
-        <mc:Choice xmlns:a14="http://schemas.microsoft.com/office/drawing/2010/main" Requires="a14">
+      <mc:AlternateContent xmlns:mc="http://schemas.openxmlformats.org/markup-compatibility/2006" xmlns:a14="http://schemas.microsoft.com/office/drawing/2010/main">
+        <mc:Choice Requires="a14">
           <p:sp>
             <p:nvSpPr>
               <p:cNvPr id="4" name="文本框 3">
@@ -12319,6 +12324,7 @@
               </a:bodyPr>
               <a:lstStyle/>
               <a:p>
+                <a:pPr/>
                 <a14:m>
                   <m:oMathPara xmlns:m="http://schemas.openxmlformats.org/officeDocument/2006/math">
                     <m:oMathParaPr>
@@ -12343,7 +12349,7 @@
             </p:txBody>
           </p:sp>
         </mc:Choice>
-        <mc:Fallback>
+        <mc:Fallback xmlns="">
           <p:sp>
             <p:nvSpPr>
               <p:cNvPr id="4" name="文本框 3">
@@ -12388,8 +12394,8 @@
           </p:sp>
         </mc:Fallback>
       </mc:AlternateContent>
-      <mc:AlternateContent xmlns:mc="http://schemas.openxmlformats.org/markup-compatibility/2006">
-        <mc:Choice xmlns:a14="http://schemas.microsoft.com/office/drawing/2010/main" Requires="a14">
+      <mc:AlternateContent xmlns:mc="http://schemas.openxmlformats.org/markup-compatibility/2006" xmlns:a14="http://schemas.microsoft.com/office/drawing/2010/main">
+        <mc:Choice Requires="a14">
           <p:sp>
             <p:nvSpPr>
               <p:cNvPr id="5" name="文本框 4">
@@ -12418,6 +12424,7 @@
               </a:bodyPr>
               <a:lstStyle/>
               <a:p>
+                <a:pPr/>
                 <a14:m>
                   <m:oMathPara xmlns:m="http://schemas.openxmlformats.org/officeDocument/2006/math">
                     <m:oMathParaPr>
@@ -12438,7 +12445,7 @@
             </p:txBody>
           </p:sp>
         </mc:Choice>
-        <mc:Fallback>
+        <mc:Fallback xmlns="">
           <p:sp>
             <p:nvSpPr>
               <p:cNvPr id="5" name="文本框 4">
@@ -12525,8 +12532,8 @@
           </a:p>
         </p:txBody>
       </p:sp>
-      <mc:AlternateContent xmlns:mc="http://schemas.openxmlformats.org/markup-compatibility/2006">
-        <mc:Choice xmlns:a14="http://schemas.microsoft.com/office/drawing/2010/main" Requires="a14">
+      <mc:AlternateContent xmlns:mc="http://schemas.openxmlformats.org/markup-compatibility/2006" xmlns:a14="http://schemas.microsoft.com/office/drawing/2010/main">
+        <mc:Choice Requires="a14">
           <p:sp>
             <p:nvSpPr>
               <p:cNvPr id="8" name="文本框 7">
@@ -12580,7 +12587,7 @@
             </p:txBody>
           </p:sp>
         </mc:Choice>
-        <mc:Fallback>
+        <mc:Fallback xmlns="">
           <p:sp>
             <p:nvSpPr>
               <p:cNvPr id="8" name="文本框 7">
@@ -12625,8 +12632,8 @@
           </p:sp>
         </mc:Fallback>
       </mc:AlternateContent>
-      <mc:AlternateContent xmlns:mc="http://schemas.openxmlformats.org/markup-compatibility/2006">
-        <mc:Choice xmlns:a14="http://schemas.microsoft.com/office/drawing/2010/main" Requires="a14">
+      <mc:AlternateContent xmlns:mc="http://schemas.openxmlformats.org/markup-compatibility/2006" xmlns:a14="http://schemas.microsoft.com/office/drawing/2010/main">
+        <mc:Choice Requires="a14">
           <p:sp>
             <p:nvSpPr>
               <p:cNvPr id="9" name="文本框 8">
@@ -12676,7 +12683,7 @@
             </p:txBody>
           </p:sp>
         </mc:Choice>
-        <mc:Fallback>
+        <mc:Fallback xmlns="">
           <p:sp>
             <p:nvSpPr>
               <p:cNvPr id="9" name="文本框 8">
@@ -12721,8 +12728,8 @@
           </p:sp>
         </mc:Fallback>
       </mc:AlternateContent>
-      <mc:AlternateContent xmlns:mc="http://schemas.openxmlformats.org/markup-compatibility/2006">
-        <mc:Choice xmlns:a14="http://schemas.microsoft.com/office/drawing/2010/main" Requires="a14">
+      <mc:AlternateContent xmlns:mc="http://schemas.openxmlformats.org/markup-compatibility/2006" xmlns:a14="http://schemas.microsoft.com/office/drawing/2010/main">
+        <mc:Choice Requires="a14">
           <p:sp>
             <p:nvSpPr>
               <p:cNvPr id="10" name="文本框 9">
@@ -12751,6 +12758,7 @@
               </a:bodyPr>
               <a:lstStyle/>
               <a:p>
+                <a:pPr/>
                 <a14:m>
                   <m:oMathPara xmlns:m="http://schemas.openxmlformats.org/officeDocument/2006/math">
                     <m:oMathParaPr>
@@ -12790,7 +12798,7 @@
             </p:txBody>
           </p:sp>
         </mc:Choice>
-        <mc:Fallback>
+        <mc:Fallback xmlns="">
           <p:sp>
             <p:nvSpPr>
               <p:cNvPr id="10" name="文本框 9">
@@ -12877,8 +12885,8 @@
           </a:fontRef>
         </p:style>
       </p:cxnSp>
-      <mc:AlternateContent xmlns:mc="http://schemas.openxmlformats.org/markup-compatibility/2006">
-        <mc:Choice xmlns:a14="http://schemas.microsoft.com/office/drawing/2010/main" Requires="a14">
+      <mc:AlternateContent xmlns:mc="http://schemas.openxmlformats.org/markup-compatibility/2006" xmlns:a14="http://schemas.microsoft.com/office/drawing/2010/main">
+        <mc:Choice Requires="a14">
           <p:sp>
             <p:nvSpPr>
               <p:cNvPr id="14" name="文本框 13">
@@ -12907,6 +12915,7 @@
               </a:bodyPr>
               <a:lstStyle/>
               <a:p>
+                <a:pPr/>
                 <a14:m>
                   <m:oMathPara xmlns:m="http://schemas.openxmlformats.org/officeDocument/2006/math">
                     <m:oMathParaPr>
@@ -12928,7 +12937,7 @@
             </p:txBody>
           </p:sp>
         </mc:Choice>
-        <mc:Fallback>
+        <mc:Fallback xmlns="">
           <p:sp>
             <p:nvSpPr>
               <p:cNvPr id="14" name="文本框 13">
@@ -13014,8 +13023,8 @@
           </a:fontRef>
         </p:style>
       </p:cxnSp>
-      <mc:AlternateContent xmlns:mc="http://schemas.openxmlformats.org/markup-compatibility/2006">
-        <mc:Choice xmlns:a14="http://schemas.microsoft.com/office/drawing/2010/main" Requires="a14">
+      <mc:AlternateContent xmlns:mc="http://schemas.openxmlformats.org/markup-compatibility/2006" xmlns:a14="http://schemas.microsoft.com/office/drawing/2010/main">
+        <mc:Choice Requires="a14">
           <p:sp>
             <p:nvSpPr>
               <p:cNvPr id="18" name="文本框 17">
@@ -13044,6 +13053,7 @@
               </a:bodyPr>
               <a:lstStyle/>
               <a:p>
+                <a:pPr/>
                 <a14:m>
                   <m:oMathPara xmlns:m="http://schemas.openxmlformats.org/officeDocument/2006/math">
                     <m:oMathParaPr>
@@ -13083,7 +13093,7 @@
             </p:txBody>
           </p:sp>
         </mc:Choice>
-        <mc:Fallback>
+        <mc:Fallback xmlns="">
           <p:sp>
             <p:nvSpPr>
               <p:cNvPr id="18" name="文本框 17">
@@ -13128,8 +13138,8 @@
           </p:sp>
         </mc:Fallback>
       </mc:AlternateContent>
-      <mc:AlternateContent xmlns:mc="http://schemas.openxmlformats.org/markup-compatibility/2006">
-        <mc:Choice xmlns:a14="http://schemas.microsoft.com/office/drawing/2010/main" Requires="a14">
+      <mc:AlternateContent xmlns:mc="http://schemas.openxmlformats.org/markup-compatibility/2006" xmlns:a14="http://schemas.microsoft.com/office/drawing/2010/main">
+        <mc:Choice Requires="a14">
           <p:sp>
             <p:nvSpPr>
               <p:cNvPr id="19" name="文本框 18">
@@ -13158,6 +13168,7 @@
               </a:bodyPr>
               <a:lstStyle/>
               <a:p>
+                <a:pPr/>
                 <a14:m>
                   <m:oMathPara xmlns:m="http://schemas.openxmlformats.org/officeDocument/2006/math">
                     <m:oMathParaPr>
@@ -13197,7 +13208,7 @@
             </p:txBody>
           </p:sp>
         </mc:Choice>
-        <mc:Fallback>
+        <mc:Fallback xmlns="">
           <p:sp>
             <p:nvSpPr>
               <p:cNvPr id="19" name="文本框 18">
@@ -13322,8 +13333,8 @@
           </a:fontRef>
         </p:style>
       </p:cxnSp>
-      <mc:AlternateContent xmlns:mc="http://schemas.openxmlformats.org/markup-compatibility/2006">
-        <mc:Choice xmlns:a14="http://schemas.microsoft.com/office/drawing/2010/main" Requires="a14">
+      <mc:AlternateContent xmlns:mc="http://schemas.openxmlformats.org/markup-compatibility/2006" xmlns:a14="http://schemas.microsoft.com/office/drawing/2010/main">
+        <mc:Choice Requires="a14">
           <p:sp>
             <p:nvSpPr>
               <p:cNvPr id="27" name="文本框 26">
@@ -13352,6 +13363,7 @@
               </a:bodyPr>
               <a:lstStyle/>
               <a:p>
+                <a:pPr/>
                 <a14:m>
                   <m:oMathPara xmlns:m="http://schemas.openxmlformats.org/officeDocument/2006/math">
                     <m:oMathParaPr>
@@ -13391,7 +13403,7 @@
             </p:txBody>
           </p:sp>
         </mc:Choice>
-        <mc:Fallback>
+        <mc:Fallback xmlns="">
           <p:sp>
             <p:nvSpPr>
               <p:cNvPr id="27" name="文本框 26">
@@ -13436,8 +13448,8 @@
           </p:sp>
         </mc:Fallback>
       </mc:AlternateContent>
-      <mc:AlternateContent xmlns:mc="http://schemas.openxmlformats.org/markup-compatibility/2006">
-        <mc:Choice xmlns:a14="http://schemas.microsoft.com/office/drawing/2010/main" Requires="a14">
+      <mc:AlternateContent xmlns:mc="http://schemas.openxmlformats.org/markup-compatibility/2006" xmlns:a14="http://schemas.microsoft.com/office/drawing/2010/main">
+        <mc:Choice Requires="a14">
           <p:sp>
             <p:nvSpPr>
               <p:cNvPr id="30" name="文本框 29">
@@ -13489,7 +13501,7 @@
             </p:txBody>
           </p:sp>
         </mc:Choice>
-        <mc:Fallback>
+        <mc:Fallback xmlns="">
           <p:sp>
             <p:nvSpPr>
               <p:cNvPr id="30" name="文本框 29">
@@ -13534,8 +13546,8 @@
           </p:sp>
         </mc:Fallback>
       </mc:AlternateContent>
-      <mc:AlternateContent xmlns:mc="http://schemas.openxmlformats.org/markup-compatibility/2006">
-        <mc:Choice xmlns:a14="http://schemas.microsoft.com/office/drawing/2010/main" Requires="a14">
+      <mc:AlternateContent xmlns:mc="http://schemas.openxmlformats.org/markup-compatibility/2006" xmlns:a14="http://schemas.microsoft.com/office/drawing/2010/main">
+        <mc:Choice Requires="a14">
           <p:sp>
             <p:nvSpPr>
               <p:cNvPr id="31" name="文本框 30">
@@ -13583,7 +13595,7 @@
             </p:txBody>
           </p:sp>
         </mc:Choice>
-        <mc:Fallback>
+        <mc:Fallback xmlns="">
           <p:sp>
             <p:nvSpPr>
               <p:cNvPr id="31" name="文本框 30">
@@ -13628,8 +13640,8 @@
           </p:sp>
         </mc:Fallback>
       </mc:AlternateContent>
-      <mc:AlternateContent xmlns:mc="http://schemas.openxmlformats.org/markup-compatibility/2006">
-        <mc:Choice xmlns:a14="http://schemas.microsoft.com/office/drawing/2010/main" Requires="a14">
+      <mc:AlternateContent xmlns:mc="http://schemas.openxmlformats.org/markup-compatibility/2006" xmlns:a14="http://schemas.microsoft.com/office/drawing/2010/main">
+        <mc:Choice Requires="a14">
           <p:sp>
             <p:nvSpPr>
               <p:cNvPr id="33" name="文本框 32">
@@ -13696,7 +13708,7 @@
             </p:txBody>
           </p:sp>
         </mc:Choice>
-        <mc:Fallback>
+        <mc:Fallback xmlns="">
           <p:sp>
             <p:nvSpPr>
               <p:cNvPr id="33" name="文本框 32">
@@ -13741,8 +13753,8 @@
           </p:sp>
         </mc:Fallback>
       </mc:AlternateContent>
-      <mc:AlternateContent xmlns:mc="http://schemas.openxmlformats.org/markup-compatibility/2006">
-        <mc:Choice xmlns:a14="http://schemas.microsoft.com/office/drawing/2010/main" Requires="a14">
+      <mc:AlternateContent xmlns:mc="http://schemas.openxmlformats.org/markup-compatibility/2006" xmlns:a14="http://schemas.microsoft.com/office/drawing/2010/main">
+        <mc:Choice Requires="a14">
           <p:sp>
             <p:nvSpPr>
               <p:cNvPr id="34" name="文本框 33">
@@ -13809,7 +13821,7 @@
             </p:txBody>
           </p:sp>
         </mc:Choice>
-        <mc:Fallback>
+        <mc:Fallback xmlns="">
           <p:sp>
             <p:nvSpPr>
               <p:cNvPr id="34" name="文本框 33">
@@ -13854,8 +13866,8 @@
           </p:sp>
         </mc:Fallback>
       </mc:AlternateContent>
-      <mc:AlternateContent xmlns:mc="http://schemas.openxmlformats.org/markup-compatibility/2006">
-        <mc:Choice xmlns:a14="http://schemas.microsoft.com/office/drawing/2010/main" Requires="a14">
+      <mc:AlternateContent xmlns:mc="http://schemas.openxmlformats.org/markup-compatibility/2006" xmlns:a14="http://schemas.microsoft.com/office/drawing/2010/main">
+        <mc:Choice Requires="a14">
           <p:sp>
             <p:nvSpPr>
               <p:cNvPr id="35" name="文本框 34">
@@ -13928,7 +13940,7 @@
             </p:txBody>
           </p:sp>
         </mc:Choice>
-        <mc:Fallback>
+        <mc:Fallback xmlns="">
           <p:sp>
             <p:nvSpPr>
               <p:cNvPr id="35" name="文本框 34">
@@ -13973,8 +13985,8 @@
           </p:sp>
         </mc:Fallback>
       </mc:AlternateContent>
-      <mc:AlternateContent xmlns:mc="http://schemas.openxmlformats.org/markup-compatibility/2006">
-        <mc:Choice xmlns:a14="http://schemas.microsoft.com/office/drawing/2010/main" Requires="a14">
+      <mc:AlternateContent xmlns:mc="http://schemas.openxmlformats.org/markup-compatibility/2006" xmlns:a14="http://schemas.microsoft.com/office/drawing/2010/main">
+        <mc:Choice Requires="a14">
           <p:sp>
             <p:nvSpPr>
               <p:cNvPr id="36" name="文本框 35">
@@ -14047,7 +14059,7 @@
             </p:txBody>
           </p:sp>
         </mc:Choice>
-        <mc:Fallback>
+        <mc:Fallback xmlns="">
           <p:sp>
             <p:nvSpPr>
               <p:cNvPr id="36" name="文本框 35">
@@ -14092,8 +14104,8 @@
           </p:sp>
         </mc:Fallback>
       </mc:AlternateContent>
-      <mc:AlternateContent xmlns:mc="http://schemas.openxmlformats.org/markup-compatibility/2006">
-        <mc:Choice xmlns:a14="http://schemas.microsoft.com/office/drawing/2010/main" Requires="a14">
+      <mc:AlternateContent xmlns:mc="http://schemas.openxmlformats.org/markup-compatibility/2006" xmlns:a14="http://schemas.microsoft.com/office/drawing/2010/main">
+        <mc:Choice Requires="a14">
           <p:sp>
             <p:nvSpPr>
               <p:cNvPr id="37" name="文本框 36">
@@ -14142,7 +14154,7 @@
             </p:txBody>
           </p:sp>
         </mc:Choice>
-        <mc:Fallback>
+        <mc:Fallback xmlns="">
           <p:sp>
             <p:nvSpPr>
               <p:cNvPr id="37" name="文本框 36">
@@ -14187,8 +14199,8 @@
           </p:sp>
         </mc:Fallback>
       </mc:AlternateContent>
-      <mc:AlternateContent xmlns:mc="http://schemas.openxmlformats.org/markup-compatibility/2006">
-        <mc:Choice xmlns:a14="http://schemas.microsoft.com/office/drawing/2010/main" Requires="a14">
+      <mc:AlternateContent xmlns:mc="http://schemas.openxmlformats.org/markup-compatibility/2006" xmlns:a14="http://schemas.microsoft.com/office/drawing/2010/main">
+        <mc:Choice Requires="a14">
           <p:sp>
             <p:nvSpPr>
               <p:cNvPr id="38" name="文本框 37">
@@ -14217,6 +14229,7 @@
               </a:bodyPr>
               <a:lstStyle/>
               <a:p>
+                <a:pPr/>
                 <a14:m>
                   <m:oMathPara xmlns:m="http://schemas.openxmlformats.org/officeDocument/2006/math">
                     <m:oMathParaPr>
@@ -14238,7 +14251,7 @@
             </p:txBody>
           </p:sp>
         </mc:Choice>
-        <mc:Fallback>
+        <mc:Fallback xmlns="">
           <p:sp>
             <p:nvSpPr>
               <p:cNvPr id="38" name="文本框 37">
@@ -14283,8 +14296,8 @@
           </p:sp>
         </mc:Fallback>
       </mc:AlternateContent>
-      <mc:AlternateContent xmlns:mc="http://schemas.openxmlformats.org/markup-compatibility/2006">
-        <mc:Choice xmlns:a14="http://schemas.microsoft.com/office/drawing/2010/main" Requires="a14">
+      <mc:AlternateContent xmlns:mc="http://schemas.openxmlformats.org/markup-compatibility/2006" xmlns:a14="http://schemas.microsoft.com/office/drawing/2010/main">
+        <mc:Choice Requires="a14">
           <p:sp>
             <p:nvSpPr>
               <p:cNvPr id="42" name="文本框 41">
@@ -14353,7 +14366,7 @@
             </p:txBody>
           </p:sp>
         </mc:Choice>
-        <mc:Fallback>
+        <mc:Fallback xmlns="">
           <p:sp>
             <p:nvSpPr>
               <p:cNvPr id="42" name="文本框 41">
@@ -14398,8 +14411,8 @@
           </p:sp>
         </mc:Fallback>
       </mc:AlternateContent>
-      <mc:AlternateContent xmlns:mc="http://schemas.openxmlformats.org/markup-compatibility/2006">
-        <mc:Choice xmlns:a14="http://schemas.microsoft.com/office/drawing/2010/main" Requires="a14">
+      <mc:AlternateContent xmlns:mc="http://schemas.openxmlformats.org/markup-compatibility/2006" xmlns:a14="http://schemas.microsoft.com/office/drawing/2010/main">
+        <mc:Choice Requires="a14">
           <p:sp>
             <p:nvSpPr>
               <p:cNvPr id="43" name="文本框 42">
@@ -14428,6 +14441,7 @@
               </a:bodyPr>
               <a:lstStyle/>
               <a:p>
+                <a:pPr/>
                 <a14:m>
                   <m:oMathPara xmlns:m="http://schemas.openxmlformats.org/officeDocument/2006/math">
                     <m:oMathParaPr>
@@ -14467,7 +14481,7 @@
             </p:txBody>
           </p:sp>
         </mc:Choice>
-        <mc:Fallback>
+        <mc:Fallback xmlns="">
           <p:sp>
             <p:nvSpPr>
               <p:cNvPr id="43" name="文本框 42">
@@ -14554,8 +14568,8 @@
           </a:fontRef>
         </p:style>
       </p:cxnSp>
-      <mc:AlternateContent xmlns:mc="http://schemas.openxmlformats.org/markup-compatibility/2006">
-        <mc:Choice xmlns:a14="http://schemas.microsoft.com/office/drawing/2010/main" Requires="a14">
+      <mc:AlternateContent xmlns:mc="http://schemas.openxmlformats.org/markup-compatibility/2006" xmlns:a14="http://schemas.microsoft.com/office/drawing/2010/main">
+        <mc:Choice Requires="a14">
           <p:sp>
             <p:nvSpPr>
               <p:cNvPr id="45" name="文本框 44">
@@ -14584,6 +14598,7 @@
               </a:bodyPr>
               <a:lstStyle/>
               <a:p>
+                <a:pPr/>
                 <a14:m>
                   <m:oMathPara xmlns:m="http://schemas.openxmlformats.org/officeDocument/2006/math">
                     <m:oMathParaPr>
@@ -14605,7 +14620,7 @@
             </p:txBody>
           </p:sp>
         </mc:Choice>
-        <mc:Fallback>
+        <mc:Fallback xmlns="">
           <p:sp>
             <p:nvSpPr>
               <p:cNvPr id="45" name="文本框 44">
@@ -14650,8 +14665,8 @@
           </p:sp>
         </mc:Fallback>
       </mc:AlternateContent>
-      <mc:AlternateContent xmlns:mc="http://schemas.openxmlformats.org/markup-compatibility/2006">
-        <mc:Choice xmlns:a14="http://schemas.microsoft.com/office/drawing/2010/main" Requires="a14">
+      <mc:AlternateContent xmlns:mc="http://schemas.openxmlformats.org/markup-compatibility/2006" xmlns:a14="http://schemas.microsoft.com/office/drawing/2010/main">
+        <mc:Choice Requires="a14">
           <p:sp>
             <p:nvSpPr>
               <p:cNvPr id="46" name="文本框 45">
@@ -14680,6 +14695,7 @@
               </a:bodyPr>
               <a:lstStyle/>
               <a:p>
+                <a:pPr/>
                 <a14:m>
                   <m:oMathPara xmlns:m="http://schemas.openxmlformats.org/officeDocument/2006/math">
                     <m:oMathParaPr>
@@ -14719,7 +14735,7 @@
             </p:txBody>
           </p:sp>
         </mc:Choice>
-        <mc:Fallback>
+        <mc:Fallback xmlns="">
           <p:sp>
             <p:nvSpPr>
               <p:cNvPr id="46" name="文本框 45">
@@ -14803,8 +14819,8 @@
           </a:fontRef>
         </p:style>
       </p:cxnSp>
-      <mc:AlternateContent xmlns:mc="http://schemas.openxmlformats.org/markup-compatibility/2006">
-        <mc:Choice xmlns:a14="http://schemas.microsoft.com/office/drawing/2010/main" Requires="a14">
+      <mc:AlternateContent xmlns:mc="http://schemas.openxmlformats.org/markup-compatibility/2006" xmlns:a14="http://schemas.microsoft.com/office/drawing/2010/main">
+        <mc:Choice Requires="a14">
           <p:sp>
             <p:nvSpPr>
               <p:cNvPr id="54" name="文本框 53">
@@ -14873,7 +14889,7 @@
             </p:txBody>
           </p:sp>
         </mc:Choice>
-        <mc:Fallback>
+        <mc:Fallback xmlns="">
           <p:sp>
             <p:nvSpPr>
               <p:cNvPr id="54" name="文本框 53">
@@ -14959,8 +14975,8 @@
           </a:fontRef>
         </p:style>
       </p:cxnSp>
-      <mc:AlternateContent xmlns:mc="http://schemas.openxmlformats.org/markup-compatibility/2006">
-        <mc:Choice xmlns:a14="http://schemas.microsoft.com/office/drawing/2010/main" Requires="a14">
+      <mc:AlternateContent xmlns:mc="http://schemas.openxmlformats.org/markup-compatibility/2006" xmlns:a14="http://schemas.microsoft.com/office/drawing/2010/main">
+        <mc:Choice Requires="a14">
           <p:sp>
             <p:nvSpPr>
               <p:cNvPr id="56" name="文本框 55">
@@ -14989,6 +15005,7 @@
               </a:bodyPr>
               <a:lstStyle/>
               <a:p>
+                <a:pPr/>
                 <a14:m>
                   <m:oMathPara xmlns:m="http://schemas.openxmlformats.org/officeDocument/2006/math">
                     <m:oMathParaPr>
@@ -15028,7 +15045,7 @@
             </p:txBody>
           </p:sp>
         </mc:Choice>
-        <mc:Fallback>
+        <mc:Fallback xmlns="">
           <p:sp>
             <p:nvSpPr>
               <p:cNvPr id="56" name="文本框 55">
@@ -15114,8 +15131,8 @@
           </a:fontRef>
         </p:style>
       </p:cxnSp>
-      <mc:AlternateContent xmlns:mc="http://schemas.openxmlformats.org/markup-compatibility/2006">
-        <mc:Choice xmlns:a14="http://schemas.microsoft.com/office/drawing/2010/main" Requires="a14">
+      <mc:AlternateContent xmlns:mc="http://schemas.openxmlformats.org/markup-compatibility/2006" xmlns:a14="http://schemas.microsoft.com/office/drawing/2010/main">
+        <mc:Choice Requires="a14">
           <p:sp>
             <p:nvSpPr>
               <p:cNvPr id="58" name="文本框 57">
@@ -15144,6 +15161,7 @@
               </a:bodyPr>
               <a:lstStyle/>
               <a:p>
+                <a:pPr/>
                 <a14:m>
                   <m:oMathPara xmlns:m="http://schemas.openxmlformats.org/officeDocument/2006/math">
                     <m:oMathParaPr>
@@ -15183,7 +15201,7 @@
             </p:txBody>
           </p:sp>
         </mc:Choice>
-        <mc:Fallback>
+        <mc:Fallback xmlns="">
           <p:sp>
             <p:nvSpPr>
               <p:cNvPr id="58" name="文本框 57">
@@ -15228,8 +15246,8 @@
           </p:sp>
         </mc:Fallback>
       </mc:AlternateContent>
-      <mc:AlternateContent xmlns:mc="http://schemas.openxmlformats.org/markup-compatibility/2006">
-        <mc:Choice xmlns:a14="http://schemas.microsoft.com/office/drawing/2010/main" Requires="a14">
+      <mc:AlternateContent xmlns:mc="http://schemas.openxmlformats.org/markup-compatibility/2006" xmlns:a14="http://schemas.microsoft.com/office/drawing/2010/main">
+        <mc:Choice Requires="a14">
           <p:sp>
             <p:nvSpPr>
               <p:cNvPr id="59" name="文本框 58">
@@ -15258,6 +15276,7 @@
               </a:bodyPr>
               <a:lstStyle/>
               <a:p>
+                <a:pPr/>
                 <a14:m>
                   <m:oMathPara xmlns:m="http://schemas.openxmlformats.org/officeDocument/2006/math">
                     <m:oMathParaPr>
@@ -15279,7 +15298,7 @@
             </p:txBody>
           </p:sp>
         </mc:Choice>
-        <mc:Fallback>
+        <mc:Fallback xmlns="">
           <p:sp>
             <p:nvSpPr>
               <p:cNvPr id="59" name="文本框 58">
@@ -15371,8 +15390,8 @@
           </a:fontRef>
         </p:style>
       </p:cxnSp>
-      <mc:AlternateContent xmlns:mc="http://schemas.openxmlformats.org/markup-compatibility/2006">
-        <mc:Choice xmlns:a14="http://schemas.microsoft.com/office/drawing/2010/main" Requires="a14">
+      <mc:AlternateContent xmlns:mc="http://schemas.openxmlformats.org/markup-compatibility/2006" xmlns:a14="http://schemas.microsoft.com/office/drawing/2010/main">
+        <mc:Choice Requires="a14">
           <p:sp>
             <p:nvSpPr>
               <p:cNvPr id="62" name="文本框 61">
@@ -15401,6 +15420,7 @@
               </a:bodyPr>
               <a:lstStyle/>
               <a:p>
+                <a:pPr/>
                 <a14:m>
                   <m:oMathPara xmlns:m="http://schemas.openxmlformats.org/officeDocument/2006/math">
                     <m:oMathParaPr>
@@ -15422,7 +15442,7 @@
             </p:txBody>
           </p:sp>
         </mc:Choice>
-        <mc:Fallback>
+        <mc:Fallback xmlns="">
           <p:sp>
             <p:nvSpPr>
               <p:cNvPr id="62" name="文本框 61">
@@ -15600,8 +15620,8 @@
           </a:p>
         </p:txBody>
       </p:sp>
-      <mc:AlternateContent xmlns:mc="http://schemas.openxmlformats.org/markup-compatibility/2006">
-        <mc:Choice xmlns:a14="http://schemas.microsoft.com/office/drawing/2010/main" Requires="a14">
+      <mc:AlternateContent xmlns:mc="http://schemas.openxmlformats.org/markup-compatibility/2006" xmlns:a14="http://schemas.microsoft.com/office/drawing/2010/main">
+        <mc:Choice Requires="a14">
           <p:sp>
             <p:nvSpPr>
               <p:cNvPr id="64" name="文本框 63">
@@ -15752,7 +15772,7 @@
             </p:txBody>
           </p:sp>
         </mc:Choice>
-        <mc:Fallback>
+        <mc:Fallback xmlns="">
           <p:sp>
             <p:nvSpPr>
               <p:cNvPr id="64" name="文本框 63">
@@ -15797,8 +15817,8 @@
           </p:sp>
         </mc:Fallback>
       </mc:AlternateContent>
-      <mc:AlternateContent xmlns:mc="http://schemas.openxmlformats.org/markup-compatibility/2006">
-        <mc:Choice xmlns:a14="http://schemas.microsoft.com/office/drawing/2010/main" Requires="a14">
+      <mc:AlternateContent xmlns:mc="http://schemas.openxmlformats.org/markup-compatibility/2006" xmlns:a14="http://schemas.microsoft.com/office/drawing/2010/main">
+        <mc:Choice Requires="a14">
           <p:sp>
             <p:nvSpPr>
               <p:cNvPr id="65" name="文本框 64">
@@ -15949,7 +15969,7 @@
             </p:txBody>
           </p:sp>
         </mc:Choice>
-        <mc:Fallback>
+        <mc:Fallback xmlns="">
           <p:sp>
             <p:nvSpPr>
               <p:cNvPr id="65" name="文本框 64">
@@ -15994,8 +16014,8 @@
           </p:sp>
         </mc:Fallback>
       </mc:AlternateContent>
-      <mc:AlternateContent xmlns:mc="http://schemas.openxmlformats.org/markup-compatibility/2006">
-        <mc:Choice xmlns:a14="http://schemas.microsoft.com/office/drawing/2010/main" Requires="a14">
+      <mc:AlternateContent xmlns:mc="http://schemas.openxmlformats.org/markup-compatibility/2006" xmlns:a14="http://schemas.microsoft.com/office/drawing/2010/main">
+        <mc:Choice Requires="a14">
           <p:sp>
             <p:nvSpPr>
               <p:cNvPr id="66" name="文本框 65">
@@ -16146,7 +16166,7 @@
             </p:txBody>
           </p:sp>
         </mc:Choice>
-        <mc:Fallback>
+        <mc:Fallback xmlns="">
           <p:sp>
             <p:nvSpPr>
               <p:cNvPr id="66" name="文本框 65">
@@ -16191,8 +16211,8 @@
           </p:sp>
         </mc:Fallback>
       </mc:AlternateContent>
-      <mc:AlternateContent xmlns:mc="http://schemas.openxmlformats.org/markup-compatibility/2006">
-        <mc:Choice xmlns:a14="http://schemas.microsoft.com/office/drawing/2010/main" Requires="a14">
+      <mc:AlternateContent xmlns:mc="http://schemas.openxmlformats.org/markup-compatibility/2006" xmlns:a14="http://schemas.microsoft.com/office/drawing/2010/main">
+        <mc:Choice Requires="a14">
           <p:sp>
             <p:nvSpPr>
               <p:cNvPr id="67" name="文本框 66">
@@ -16343,7 +16363,7 @@
             </p:txBody>
           </p:sp>
         </mc:Choice>
-        <mc:Fallback>
+        <mc:Fallback xmlns="">
           <p:sp>
             <p:nvSpPr>
               <p:cNvPr id="67" name="文本框 66">
@@ -16388,8 +16408,8 @@
           </p:sp>
         </mc:Fallback>
       </mc:AlternateContent>
-      <mc:AlternateContent xmlns:mc="http://schemas.openxmlformats.org/markup-compatibility/2006">
-        <mc:Choice xmlns:a14="http://schemas.microsoft.com/office/drawing/2010/main" Requires="a14">
+      <mc:AlternateContent xmlns:mc="http://schemas.openxmlformats.org/markup-compatibility/2006" xmlns:a14="http://schemas.microsoft.com/office/drawing/2010/main">
+        <mc:Choice Requires="a14">
           <p:sp>
             <p:nvSpPr>
               <p:cNvPr id="69" name="文本框 68">
@@ -16478,7 +16498,7 @@
             </p:txBody>
           </p:sp>
         </mc:Choice>
-        <mc:Fallback>
+        <mc:Fallback xmlns="">
           <p:sp>
             <p:nvSpPr>
               <p:cNvPr id="69" name="文本框 68">
@@ -16570,8 +16590,8 @@
           </a:fontRef>
         </p:style>
       </p:cxnSp>
-      <mc:AlternateContent xmlns:mc="http://schemas.openxmlformats.org/markup-compatibility/2006">
-        <mc:Choice xmlns:a14="http://schemas.microsoft.com/office/drawing/2010/main" Requires="a14">
+      <mc:AlternateContent xmlns:mc="http://schemas.openxmlformats.org/markup-compatibility/2006" xmlns:a14="http://schemas.microsoft.com/office/drawing/2010/main">
+        <mc:Choice Requires="a14">
           <p:sp>
             <p:nvSpPr>
               <p:cNvPr id="71" name="文本框 70">
@@ -16600,6 +16620,7 @@
               </a:bodyPr>
               <a:lstStyle/>
               <a:p>
+                <a:pPr/>
                 <a14:m>
                   <m:oMathPara xmlns:m="http://schemas.openxmlformats.org/officeDocument/2006/math">
                     <m:oMathParaPr>
@@ -16621,7 +16642,7 @@
             </p:txBody>
           </p:sp>
         </mc:Choice>
-        <mc:Fallback>
+        <mc:Fallback xmlns="">
           <p:sp>
             <p:nvSpPr>
               <p:cNvPr id="71" name="文本框 70">
@@ -16779,8 +16800,8 @@
           </a:p>
         </p:txBody>
       </p:sp>
-      <mc:AlternateContent xmlns:mc="http://schemas.openxmlformats.org/markup-compatibility/2006">
-        <mc:Choice xmlns:a14="http://schemas.microsoft.com/office/drawing/2010/main" Requires="a14">
+      <mc:AlternateContent xmlns:mc="http://schemas.openxmlformats.org/markup-compatibility/2006" xmlns:a14="http://schemas.microsoft.com/office/drawing/2010/main">
+        <mc:Choice Requires="a14">
           <p:sp>
             <p:nvSpPr>
               <p:cNvPr id="76" name="文本框 75">
@@ -16869,7 +16890,7 @@
             </p:txBody>
           </p:sp>
         </mc:Choice>
-        <mc:Fallback>
+        <mc:Fallback xmlns="">
           <p:sp>
             <p:nvSpPr>
               <p:cNvPr id="76" name="文本框 75">
@@ -16961,8 +16982,8 @@
           </a:fontRef>
         </p:style>
       </p:cxnSp>
-      <mc:AlternateContent xmlns:mc="http://schemas.openxmlformats.org/markup-compatibility/2006">
-        <mc:Choice xmlns:a14="http://schemas.microsoft.com/office/drawing/2010/main" Requires="a14">
+      <mc:AlternateContent xmlns:mc="http://schemas.openxmlformats.org/markup-compatibility/2006" xmlns:a14="http://schemas.microsoft.com/office/drawing/2010/main">
+        <mc:Choice Requires="a14">
           <p:sp>
             <p:nvSpPr>
               <p:cNvPr id="78" name="文本框 77">
@@ -16991,6 +17012,7 @@
               </a:bodyPr>
               <a:lstStyle/>
               <a:p>
+                <a:pPr/>
                 <a14:m>
                   <m:oMathPara xmlns:m="http://schemas.openxmlformats.org/officeDocument/2006/math">
                     <m:oMathParaPr>
@@ -17012,7 +17034,7 @@
             </p:txBody>
           </p:sp>
         </mc:Choice>
-        <mc:Fallback>
+        <mc:Fallback xmlns="">
           <p:sp>
             <p:nvSpPr>
               <p:cNvPr id="78" name="文本框 77">
@@ -17103,8 +17125,8 @@
           </a:fontRef>
         </p:style>
       </p:cxnSp>
-      <mc:AlternateContent xmlns:mc="http://schemas.openxmlformats.org/markup-compatibility/2006">
-        <mc:Choice xmlns:a14="http://schemas.microsoft.com/office/drawing/2010/main" Requires="a14">
+      <mc:AlternateContent xmlns:mc="http://schemas.openxmlformats.org/markup-compatibility/2006" xmlns:a14="http://schemas.microsoft.com/office/drawing/2010/main">
+        <mc:Choice Requires="a14">
           <p:sp>
             <p:nvSpPr>
               <p:cNvPr id="80" name="文本框 79">
@@ -17133,6 +17155,7 @@
               </a:bodyPr>
               <a:lstStyle/>
               <a:p>
+                <a:pPr/>
                 <a14:m>
                   <m:oMathPara xmlns:m="http://schemas.openxmlformats.org/officeDocument/2006/math">
                     <m:oMathParaPr>
@@ -17154,7 +17177,7 @@
             </p:txBody>
           </p:sp>
         </mc:Choice>
-        <mc:Fallback>
+        <mc:Fallback xmlns="">
           <p:sp>
             <p:nvSpPr>
               <p:cNvPr id="80" name="文本框 79">
@@ -17291,8 +17314,8 @@
           </a:p>
         </p:txBody>
       </p:sp>
-      <mc:AlternateContent xmlns:mc="http://schemas.openxmlformats.org/markup-compatibility/2006">
-        <mc:Choice xmlns:a14="http://schemas.microsoft.com/office/drawing/2010/main" Requires="a14">
+      <mc:AlternateContent xmlns:mc="http://schemas.openxmlformats.org/markup-compatibility/2006" xmlns:a14="http://schemas.microsoft.com/office/drawing/2010/main">
+        <mc:Choice Requires="a14">
           <p:sp>
             <p:nvSpPr>
               <p:cNvPr id="83" name="文本框 82">
@@ -17381,7 +17404,7 @@
             </p:txBody>
           </p:sp>
         </mc:Choice>
-        <mc:Fallback>
+        <mc:Fallback xmlns="">
           <p:sp>
             <p:nvSpPr>
               <p:cNvPr id="83" name="文本框 82">
@@ -17519,8 +17542,8 @@
           </a:p>
         </p:txBody>
       </p:sp>
-      <mc:AlternateContent xmlns:mc="http://schemas.openxmlformats.org/markup-compatibility/2006">
-        <mc:Choice xmlns:a14="http://schemas.microsoft.com/office/drawing/2010/main" Requires="a14">
+      <mc:AlternateContent xmlns:mc="http://schemas.openxmlformats.org/markup-compatibility/2006" xmlns:a14="http://schemas.microsoft.com/office/drawing/2010/main">
+        <mc:Choice Requires="a14">
           <p:sp>
             <p:nvSpPr>
               <p:cNvPr id="86" name="文本框 85">
@@ -17609,7 +17632,7 @@
             </p:txBody>
           </p:sp>
         </mc:Choice>
-        <mc:Fallback>
+        <mc:Fallback xmlns="">
           <p:sp>
             <p:nvSpPr>
               <p:cNvPr id="86" name="文本框 85">
@@ -17739,8 +17762,8 @@
           </a:p>
         </p:txBody>
       </p:sp>
-      <mc:AlternateContent xmlns:mc="http://schemas.openxmlformats.org/markup-compatibility/2006">
-        <mc:Choice xmlns:a14="http://schemas.microsoft.com/office/drawing/2010/main" Requires="a14">
+      <mc:AlternateContent xmlns:mc="http://schemas.openxmlformats.org/markup-compatibility/2006" xmlns:a14="http://schemas.microsoft.com/office/drawing/2010/main">
+        <mc:Choice Requires="a14">
           <p:sp>
             <p:nvSpPr>
               <p:cNvPr id="88" name="文本框 87">
@@ -17769,6 +17792,7 @@
               </a:bodyPr>
               <a:lstStyle/>
               <a:p>
+                <a:pPr/>
                 <a14:m>
                   <m:oMathPara xmlns:m="http://schemas.openxmlformats.org/officeDocument/2006/math">
                     <m:oMathParaPr>
@@ -17790,7 +17814,7 @@
             </p:txBody>
           </p:sp>
         </mc:Choice>
-        <mc:Fallback>
+        <mc:Fallback xmlns="">
           <p:sp>
             <p:nvSpPr>
               <p:cNvPr id="88" name="文本框 87">
@@ -17920,8 +17944,8 @@
           </a:p>
         </p:txBody>
       </p:sp>
-      <mc:AlternateContent xmlns:mc="http://schemas.openxmlformats.org/markup-compatibility/2006">
-        <mc:Choice xmlns:a14="http://schemas.microsoft.com/office/drawing/2010/main" Requires="a14">
+      <mc:AlternateContent xmlns:mc="http://schemas.openxmlformats.org/markup-compatibility/2006" xmlns:a14="http://schemas.microsoft.com/office/drawing/2010/main">
+        <mc:Choice Requires="a14">
           <p:sp>
             <p:nvSpPr>
               <p:cNvPr id="91" name="文本框 90">
@@ -18010,7 +18034,7 @@
             </p:txBody>
           </p:sp>
         </mc:Choice>
-        <mc:Fallback>
+        <mc:Fallback xmlns="">
           <p:sp>
             <p:nvSpPr>
               <p:cNvPr id="91" name="文本框 90">
@@ -18150,8 +18174,8 @@
           </a:p>
         </p:txBody>
       </p:sp>
-      <mc:AlternateContent xmlns:mc="http://schemas.openxmlformats.org/markup-compatibility/2006">
-        <mc:Choice xmlns:a14="http://schemas.microsoft.com/office/drawing/2010/main" Requires="a14">
+      <mc:AlternateContent xmlns:mc="http://schemas.openxmlformats.org/markup-compatibility/2006" xmlns:a14="http://schemas.microsoft.com/office/drawing/2010/main">
+        <mc:Choice Requires="a14">
           <p:sp>
             <p:nvSpPr>
               <p:cNvPr id="93" name="文本框 92">
@@ -18180,6 +18204,7 @@
               </a:bodyPr>
               <a:lstStyle/>
               <a:p>
+                <a:pPr/>
                 <a14:m>
                   <m:oMathPara xmlns:m="http://schemas.openxmlformats.org/officeDocument/2006/math">
                     <m:oMathParaPr>
@@ -18201,7 +18226,7 @@
             </p:txBody>
           </p:sp>
         </mc:Choice>
-        <mc:Fallback>
+        <mc:Fallback xmlns="">
           <p:sp>
             <p:nvSpPr>
               <p:cNvPr id="93" name="文本框 92">
@@ -18331,8 +18356,8 @@
           </a:p>
         </p:txBody>
       </p:sp>
-      <mc:AlternateContent xmlns:mc="http://schemas.openxmlformats.org/markup-compatibility/2006">
-        <mc:Choice xmlns:a14="http://schemas.microsoft.com/office/drawing/2010/main" Requires="a14">
+      <mc:AlternateContent xmlns:mc="http://schemas.openxmlformats.org/markup-compatibility/2006" xmlns:a14="http://schemas.microsoft.com/office/drawing/2010/main">
+        <mc:Choice Requires="a14">
           <p:sp>
             <p:nvSpPr>
               <p:cNvPr id="96" name="文本框 95">
@@ -18421,7 +18446,7 @@
             </p:txBody>
           </p:sp>
         </mc:Choice>
-        <mc:Fallback>
+        <mc:Fallback xmlns="">
           <p:sp>
             <p:nvSpPr>
               <p:cNvPr id="96" name="文本框 95">
@@ -18551,8 +18576,8 @@
           </a:p>
         </p:txBody>
       </p:sp>
-      <mc:AlternateContent xmlns:mc="http://schemas.openxmlformats.org/markup-compatibility/2006">
-        <mc:Choice xmlns:a14="http://schemas.microsoft.com/office/drawing/2010/main" Requires="a14">
+      <mc:AlternateContent xmlns:mc="http://schemas.openxmlformats.org/markup-compatibility/2006" xmlns:a14="http://schemas.microsoft.com/office/drawing/2010/main">
+        <mc:Choice Requires="a14">
           <p:sp>
             <p:nvSpPr>
               <p:cNvPr id="99" name="文本框 98">
@@ -18627,7 +18652,7 @@
             </p:txBody>
           </p:sp>
         </mc:Choice>
-        <mc:Fallback>
+        <mc:Fallback xmlns="">
           <p:sp>
             <p:nvSpPr>
               <p:cNvPr id="99" name="文本框 98">
@@ -19212,8 +19237,8 @@
           </a:p>
         </p:txBody>
       </p:sp>
-      <mc:AlternateContent xmlns:mc="http://schemas.openxmlformats.org/markup-compatibility/2006">
-        <mc:Choice xmlns:a14="http://schemas.microsoft.com/office/drawing/2010/main" Requires="a14">
+      <mc:AlternateContent xmlns:mc="http://schemas.openxmlformats.org/markup-compatibility/2006" xmlns:a14="http://schemas.microsoft.com/office/drawing/2010/main">
+        <mc:Choice Requires="a14">
           <p:sp>
             <p:nvSpPr>
               <p:cNvPr id="11" name="文本框 10">
@@ -19242,6 +19267,7 @@
               </a:bodyPr>
               <a:lstStyle/>
               <a:p>
+                <a:pPr/>
                 <a14:m>
                   <m:oMathPara xmlns:m="http://schemas.openxmlformats.org/officeDocument/2006/math">
                     <m:oMathParaPr>
@@ -19396,13 +19422,7 @@
                             <a:rPr lang="en-US" altLang="zh-CN" b="0" i="1" smtClean="0">
                               <a:latin typeface="Cambria Math" panose="02040503050406030204" pitchFamily="18" charset="0"/>
                             </a:rPr>
-                            <m:t>)</m:t>
-                          </m:r>
-                          <m:r>
-                            <a:rPr lang="en-US" altLang="zh-CN" b="0" i="1" smtClean="0">
-                              <a:latin typeface="Cambria Math" panose="02040503050406030204" pitchFamily="18" charset="0"/>
-                            </a:rPr>
-                            <m:t>(</m:t>
+                            <m:t>)(</m:t>
                           </m:r>
                           <m:sSub>
                             <m:sSubPr>
@@ -19488,7 +19508,7 @@
             </p:txBody>
           </p:sp>
         </mc:Choice>
-        <mc:Fallback>
+        <mc:Fallback xmlns="">
           <p:sp>
             <p:nvSpPr>
               <p:cNvPr id="11" name="文本框 10">
@@ -19533,8 +19553,8 @@
           </p:sp>
         </mc:Fallback>
       </mc:AlternateContent>
-      <mc:AlternateContent xmlns:mc="http://schemas.openxmlformats.org/markup-compatibility/2006">
-        <mc:Choice xmlns:a14="http://schemas.microsoft.com/office/drawing/2010/main" Requires="a14">
+      <mc:AlternateContent xmlns:mc="http://schemas.openxmlformats.org/markup-compatibility/2006" xmlns:a14="http://schemas.microsoft.com/office/drawing/2010/main">
+        <mc:Choice Requires="a14">
           <p:sp>
             <p:nvSpPr>
               <p:cNvPr id="13" name="文本框 12">
@@ -19600,7 +19620,7 @@
             </p:txBody>
           </p:sp>
         </mc:Choice>
-        <mc:Fallback>
+        <mc:Fallback xmlns="">
           <p:sp>
             <p:nvSpPr>
               <p:cNvPr id="13" name="文本框 12">
@@ -19680,8 +19700,8 @@
           </a:p>
         </p:txBody>
       </p:sp>
-      <mc:AlternateContent xmlns:mc="http://schemas.openxmlformats.org/markup-compatibility/2006">
-        <mc:Choice xmlns:a14="http://schemas.microsoft.com/office/drawing/2010/main" Requires="a14">
+      <mc:AlternateContent xmlns:mc="http://schemas.openxmlformats.org/markup-compatibility/2006" xmlns:a14="http://schemas.microsoft.com/office/drawing/2010/main">
+        <mc:Choice Requires="a14">
           <p:sp>
             <p:nvSpPr>
               <p:cNvPr id="16" name="文本框 15">
@@ -19947,7 +19967,7 @@
             </p:txBody>
           </p:sp>
         </mc:Choice>
-        <mc:Fallback>
+        <mc:Fallback xmlns="">
           <p:sp>
             <p:nvSpPr>
               <p:cNvPr id="16" name="文本框 15">
@@ -20093,8 +20113,8 @@
           </a:p>
         </p:txBody>
       </p:sp>
-      <mc:AlternateContent xmlns:mc="http://schemas.openxmlformats.org/markup-compatibility/2006">
-        <mc:Choice xmlns:a14="http://schemas.microsoft.com/office/drawing/2010/main" Requires="a14">
+      <mc:AlternateContent xmlns:mc="http://schemas.openxmlformats.org/markup-compatibility/2006" xmlns:a14="http://schemas.microsoft.com/office/drawing/2010/main">
+        <mc:Choice Requires="a14">
           <p:sp>
             <p:nvSpPr>
               <p:cNvPr id="5" name="文本框 4">
@@ -20123,6 +20143,7 @@
               </a:bodyPr>
               <a:lstStyle/>
               <a:p>
+                <a:pPr/>
                 <a14:m>
                   <m:oMathPara xmlns:m="http://schemas.openxmlformats.org/officeDocument/2006/math">
                     <m:oMathParaPr>
@@ -20346,7 +20367,7 @@
             </p:txBody>
           </p:sp>
         </mc:Choice>
-        <mc:Fallback>
+        <mc:Fallback xmlns="">
           <p:sp>
             <p:nvSpPr>
               <p:cNvPr id="5" name="文本框 4">
@@ -20391,8 +20412,8 @@
           </p:sp>
         </mc:Fallback>
       </mc:AlternateContent>
-      <mc:AlternateContent xmlns:mc="http://schemas.openxmlformats.org/markup-compatibility/2006">
-        <mc:Choice xmlns:a14="http://schemas.microsoft.com/office/drawing/2010/main" Requires="a14">
+      <mc:AlternateContent xmlns:mc="http://schemas.openxmlformats.org/markup-compatibility/2006" xmlns:a14="http://schemas.microsoft.com/office/drawing/2010/main">
+        <mc:Choice Requires="a14">
           <p:sp>
             <p:nvSpPr>
               <p:cNvPr id="8" name="文本框 7">
@@ -20454,7 +20475,7 @@
             </p:txBody>
           </p:sp>
         </mc:Choice>
-        <mc:Fallback>
+        <mc:Fallback xmlns="">
           <p:sp>
             <p:nvSpPr>
               <p:cNvPr id="8" name="文本框 7">
@@ -20635,8 +20656,8 @@
           </a:p>
         </p:txBody>
       </p:sp>
-      <mc:AlternateContent xmlns:mc="http://schemas.openxmlformats.org/markup-compatibility/2006">
-        <mc:Choice xmlns:a14="http://schemas.microsoft.com/office/drawing/2010/main" Requires="a14">
+      <mc:AlternateContent xmlns:mc="http://schemas.openxmlformats.org/markup-compatibility/2006" xmlns:a14="http://schemas.microsoft.com/office/drawing/2010/main">
+        <mc:Choice Requires="a14">
           <p:sp>
             <p:nvSpPr>
               <p:cNvPr id="15" name="文本框 14">
@@ -20665,6 +20686,7 @@
               </a:bodyPr>
               <a:lstStyle/>
               <a:p>
+                <a:pPr/>
                 <a14:m>
                   <m:oMathPara xmlns:m="http://schemas.openxmlformats.org/officeDocument/2006/math">
                     <m:oMathParaPr>
@@ -20835,7 +20857,7 @@
             </p:txBody>
           </p:sp>
         </mc:Choice>
-        <mc:Fallback>
+        <mc:Fallback xmlns="">
           <p:sp>
             <p:nvSpPr>
               <p:cNvPr id="15" name="文本框 14">
@@ -21191,8 +21213,8 @@
           </a:fontRef>
         </p:style>
       </p:cxnSp>
-      <mc:AlternateContent xmlns:mc="http://schemas.openxmlformats.org/markup-compatibility/2006">
-        <mc:Choice xmlns:a14="http://schemas.microsoft.com/office/drawing/2010/main" Requires="a14">
+      <mc:AlternateContent xmlns:mc="http://schemas.openxmlformats.org/markup-compatibility/2006" xmlns:a14="http://schemas.microsoft.com/office/drawing/2010/main">
+        <mc:Choice Requires="a14">
           <p:sp>
             <p:nvSpPr>
               <p:cNvPr id="14" name="文本框 13">
@@ -21258,7 +21280,7 @@
             </p:txBody>
           </p:sp>
         </mc:Choice>
-        <mc:Fallback>
+        <mc:Fallback xmlns="">
           <p:sp>
             <p:nvSpPr>
               <p:cNvPr id="14" name="文本框 13">
@@ -21634,8 +21656,8 @@
           </a:p>
         </p:txBody>
       </p:sp>
-      <mc:AlternateContent xmlns:mc="http://schemas.openxmlformats.org/markup-compatibility/2006">
-        <mc:Choice xmlns:a14="http://schemas.microsoft.com/office/drawing/2010/main" Requires="a14">
+      <mc:AlternateContent xmlns:mc="http://schemas.openxmlformats.org/markup-compatibility/2006" xmlns:a14="http://schemas.microsoft.com/office/drawing/2010/main">
+        <mc:Choice Requires="a14">
           <p:sp>
             <p:nvSpPr>
               <p:cNvPr id="6" name="文本框 5">
@@ -21664,6 +21686,7 @@
               </a:bodyPr>
               <a:lstStyle/>
               <a:p>
+                <a:pPr/>
                 <a14:m>
                   <m:oMathPara xmlns:m="http://schemas.openxmlformats.org/officeDocument/2006/math">
                     <m:oMathParaPr>
@@ -21740,7 +21763,7 @@
             </p:txBody>
           </p:sp>
         </mc:Choice>
-        <mc:Fallback>
+        <mc:Fallback xmlns="">
           <p:sp>
             <p:nvSpPr>
               <p:cNvPr id="6" name="文本框 5">
@@ -21941,8 +21964,8 @@
           </a:p>
         </p:txBody>
       </p:sp>
-      <mc:AlternateContent xmlns:mc="http://schemas.openxmlformats.org/markup-compatibility/2006">
-        <mc:Choice xmlns:a14="http://schemas.microsoft.com/office/drawing/2010/main" Requires="a14">
+      <mc:AlternateContent xmlns:mc="http://schemas.openxmlformats.org/markup-compatibility/2006" xmlns:a14="http://schemas.microsoft.com/office/drawing/2010/main">
+        <mc:Choice Requires="a14">
           <p:sp>
             <p:nvSpPr>
               <p:cNvPr id="14" name="文本框 13">
@@ -21971,6 +21994,7 @@
               </a:bodyPr>
               <a:lstStyle/>
               <a:p>
+                <a:pPr/>
                 <a14:m>
                   <m:oMathPara xmlns:m="http://schemas.openxmlformats.org/officeDocument/2006/math">
                     <m:oMathParaPr>
@@ -22206,7 +22230,7 @@
             </p:txBody>
           </p:sp>
         </mc:Choice>
-        <mc:Fallback>
+        <mc:Fallback xmlns="">
           <p:sp>
             <p:nvSpPr>
               <p:cNvPr id="14" name="文本框 13">
@@ -22251,8 +22275,8 @@
           </p:sp>
         </mc:Fallback>
       </mc:AlternateContent>
-      <mc:AlternateContent xmlns:mc="http://schemas.openxmlformats.org/markup-compatibility/2006">
-        <mc:Choice xmlns:a14="http://schemas.microsoft.com/office/drawing/2010/main" Requires="a14">
+      <mc:AlternateContent xmlns:mc="http://schemas.openxmlformats.org/markup-compatibility/2006" xmlns:a14="http://schemas.microsoft.com/office/drawing/2010/main">
+        <mc:Choice Requires="a14">
           <p:sp>
             <p:nvSpPr>
               <p:cNvPr id="15" name="文本框 14">
@@ -22312,7 +22336,7 @@
             </p:txBody>
           </p:sp>
         </mc:Choice>
-        <mc:Fallback>
+        <mc:Fallback xmlns="">
           <p:sp>
             <p:nvSpPr>
               <p:cNvPr id="15" name="文本框 14">
@@ -22357,8 +22381,8 @@
           </p:sp>
         </mc:Fallback>
       </mc:AlternateContent>
-      <mc:AlternateContent xmlns:mc="http://schemas.openxmlformats.org/markup-compatibility/2006">
-        <mc:Choice xmlns:a14="http://schemas.microsoft.com/office/drawing/2010/main" Requires="a14">
+      <mc:AlternateContent xmlns:mc="http://schemas.openxmlformats.org/markup-compatibility/2006" xmlns:a14="http://schemas.microsoft.com/office/drawing/2010/main">
+        <mc:Choice Requires="a14">
           <p:sp>
             <p:nvSpPr>
               <p:cNvPr id="18" name="文本框 17">
@@ -22471,7 +22495,7 @@
             </p:txBody>
           </p:sp>
         </mc:Choice>
-        <mc:Fallback>
+        <mc:Fallback xmlns="">
           <p:sp>
             <p:nvSpPr>
               <p:cNvPr id="18" name="文本框 17">
@@ -22516,8 +22540,8 @@
           </p:sp>
         </mc:Fallback>
       </mc:AlternateContent>
-      <mc:AlternateContent xmlns:mc="http://schemas.openxmlformats.org/markup-compatibility/2006">
-        <mc:Choice xmlns:a14="http://schemas.microsoft.com/office/drawing/2010/main" Requires="a14">
+      <mc:AlternateContent xmlns:mc="http://schemas.openxmlformats.org/markup-compatibility/2006" xmlns:a14="http://schemas.microsoft.com/office/drawing/2010/main">
+        <mc:Choice Requires="a14">
           <p:sp>
             <p:nvSpPr>
               <p:cNvPr id="19" name="文本框 18">
@@ -22546,6 +22570,7 @@
               </a:bodyPr>
               <a:lstStyle/>
               <a:p>
+                <a:pPr/>
                 <a14:m>
                   <m:oMathPara xmlns:m="http://schemas.openxmlformats.org/officeDocument/2006/math">
                     <m:oMathParaPr>
@@ -22688,7 +22713,7 @@
             </p:txBody>
           </p:sp>
         </mc:Choice>
-        <mc:Fallback>
+        <mc:Fallback xmlns="">
           <p:sp>
             <p:nvSpPr>
               <p:cNvPr id="19" name="文本框 18">
@@ -22733,8 +22758,8 @@
           </p:sp>
         </mc:Fallback>
       </mc:AlternateContent>
-      <mc:AlternateContent xmlns:mc="http://schemas.openxmlformats.org/markup-compatibility/2006">
-        <mc:Choice xmlns:a14="http://schemas.microsoft.com/office/drawing/2010/main" Requires="a14">
+      <mc:AlternateContent xmlns:mc="http://schemas.openxmlformats.org/markup-compatibility/2006" xmlns:a14="http://schemas.microsoft.com/office/drawing/2010/main">
+        <mc:Choice Requires="a14">
           <p:sp>
             <p:nvSpPr>
               <p:cNvPr id="21" name="文本框 20">
@@ -22796,7 +22821,7 @@
             </p:txBody>
           </p:sp>
         </mc:Choice>
-        <mc:Fallback>
+        <mc:Fallback xmlns="">
           <p:sp>
             <p:nvSpPr>
               <p:cNvPr id="21" name="文本框 20">
@@ -22841,8 +22866,8 @@
           </p:sp>
         </mc:Fallback>
       </mc:AlternateContent>
-      <mc:AlternateContent xmlns:mc="http://schemas.openxmlformats.org/markup-compatibility/2006">
-        <mc:Choice xmlns:a14="http://schemas.microsoft.com/office/drawing/2010/main" Requires="a14">
+      <mc:AlternateContent xmlns:mc="http://schemas.openxmlformats.org/markup-compatibility/2006" xmlns:a14="http://schemas.microsoft.com/office/drawing/2010/main">
+        <mc:Choice Requires="a14">
           <p:sp>
             <p:nvSpPr>
               <p:cNvPr id="22" name="文本框 21">
@@ -22871,6 +22896,7 @@
               </a:bodyPr>
               <a:lstStyle/>
               <a:p>
+                <a:pPr/>
                 <a14:m>
                   <m:oMathPara xmlns:m="http://schemas.openxmlformats.org/officeDocument/2006/math">
                     <m:oMathParaPr>
@@ -23145,7 +23171,7 @@
             </p:txBody>
           </p:sp>
         </mc:Choice>
-        <mc:Fallback>
+        <mc:Fallback xmlns="">
           <p:sp>
             <p:nvSpPr>
               <p:cNvPr id="22" name="文本框 21">
@@ -23190,8 +23216,8 @@
           </p:sp>
         </mc:Fallback>
       </mc:AlternateContent>
-      <mc:AlternateContent xmlns:mc="http://schemas.openxmlformats.org/markup-compatibility/2006">
-        <mc:Choice xmlns:a14="http://schemas.microsoft.com/office/drawing/2010/main" Requires="a14">
+      <mc:AlternateContent xmlns:mc="http://schemas.openxmlformats.org/markup-compatibility/2006" xmlns:a14="http://schemas.microsoft.com/office/drawing/2010/main">
+        <mc:Choice Requires="a14">
           <p:sp>
             <p:nvSpPr>
               <p:cNvPr id="24" name="文本框 23">
@@ -23275,7 +23301,7 @@
             </p:txBody>
           </p:sp>
         </mc:Choice>
-        <mc:Fallback>
+        <mc:Fallback xmlns="">
           <p:sp>
             <p:nvSpPr>
               <p:cNvPr id="24" name="文本框 23">
@@ -23320,8 +23346,8 @@
           </p:sp>
         </mc:Fallback>
       </mc:AlternateContent>
-      <mc:AlternateContent xmlns:mc="http://schemas.openxmlformats.org/markup-compatibility/2006">
-        <mc:Choice xmlns:a14="http://schemas.microsoft.com/office/drawing/2010/main" Requires="a14">
+      <mc:AlternateContent xmlns:mc="http://schemas.openxmlformats.org/markup-compatibility/2006" xmlns:a14="http://schemas.microsoft.com/office/drawing/2010/main">
+        <mc:Choice Requires="a14">
           <p:sp>
             <p:nvSpPr>
               <p:cNvPr id="26" name="文本框 25">
@@ -23404,7 +23430,7 @@
             </p:txBody>
           </p:sp>
         </mc:Choice>
-        <mc:Fallback>
+        <mc:Fallback xmlns="">
           <p:sp>
             <p:nvSpPr>
               <p:cNvPr id="26" name="文本框 25">
@@ -23449,8 +23475,8 @@
           </p:sp>
         </mc:Fallback>
       </mc:AlternateContent>
-      <mc:AlternateContent xmlns:mc="http://schemas.openxmlformats.org/markup-compatibility/2006">
-        <mc:Choice xmlns:a14="http://schemas.microsoft.com/office/drawing/2010/main" Requires="a14">
+      <mc:AlternateContent xmlns:mc="http://schemas.openxmlformats.org/markup-compatibility/2006" xmlns:a14="http://schemas.microsoft.com/office/drawing/2010/main">
+        <mc:Choice Requires="a14">
           <p:sp>
             <p:nvSpPr>
               <p:cNvPr id="28" name="文本框 27">
@@ -23479,6 +23505,7 @@
               </a:bodyPr>
               <a:lstStyle/>
               <a:p>
+                <a:pPr/>
                 <a14:m>
                   <m:oMathPara xmlns:m="http://schemas.openxmlformats.org/officeDocument/2006/math">
                     <m:oMathParaPr>
@@ -23655,7 +23682,7 @@
             </p:txBody>
           </p:sp>
         </mc:Choice>
-        <mc:Fallback>
+        <mc:Fallback xmlns="">
           <p:sp>
             <p:nvSpPr>
               <p:cNvPr id="28" name="文本框 27">
@@ -23700,8 +23727,8 @@
           </p:sp>
         </mc:Fallback>
       </mc:AlternateContent>
-      <mc:AlternateContent xmlns:mc="http://schemas.openxmlformats.org/markup-compatibility/2006">
-        <mc:Choice xmlns:a14="http://schemas.microsoft.com/office/drawing/2010/main" Requires="a14">
+      <mc:AlternateContent xmlns:mc="http://schemas.openxmlformats.org/markup-compatibility/2006" xmlns:a14="http://schemas.microsoft.com/office/drawing/2010/main">
+        <mc:Choice Requires="a14">
           <p:sp>
             <p:nvSpPr>
               <p:cNvPr id="30" name="文本框 29">
@@ -23800,7 +23827,7 @@
             </p:txBody>
           </p:sp>
         </mc:Choice>
-        <mc:Fallback>
+        <mc:Fallback xmlns="">
           <p:sp>
             <p:nvSpPr>
               <p:cNvPr id="30" name="文本框 29">
@@ -24165,8 +24192,8 @@
           </a:fontRef>
         </p:style>
       </p:cxnSp>
-      <mc:AlternateContent xmlns:mc="http://schemas.openxmlformats.org/markup-compatibility/2006">
-        <mc:Choice xmlns:a14="http://schemas.microsoft.com/office/drawing/2010/main" Requires="a14">
+      <mc:AlternateContent xmlns:mc="http://schemas.openxmlformats.org/markup-compatibility/2006" xmlns:a14="http://schemas.microsoft.com/office/drawing/2010/main">
+        <mc:Choice Requires="a14">
           <p:sp>
             <p:nvSpPr>
               <p:cNvPr id="21" name="文本框 20">
@@ -24195,6 +24222,7 @@
               </a:bodyPr>
               <a:lstStyle/>
               <a:p>
+                <a:pPr/>
                 <a14:m>
                   <m:oMathPara xmlns:m="http://schemas.openxmlformats.org/officeDocument/2006/math">
                     <m:oMathParaPr>
@@ -24359,7 +24387,7 @@
             </p:txBody>
           </p:sp>
         </mc:Choice>
-        <mc:Fallback>
+        <mc:Fallback xmlns="">
           <p:sp>
             <p:nvSpPr>
               <p:cNvPr id="21" name="文本框 20">
@@ -24404,8 +24432,8 @@
           </p:sp>
         </mc:Fallback>
       </mc:AlternateContent>
-      <mc:AlternateContent xmlns:mc="http://schemas.openxmlformats.org/markup-compatibility/2006">
-        <mc:Choice xmlns:a14="http://schemas.microsoft.com/office/drawing/2010/main" Requires="a14">
+      <mc:AlternateContent xmlns:mc="http://schemas.openxmlformats.org/markup-compatibility/2006" xmlns:a14="http://schemas.microsoft.com/office/drawing/2010/main">
+        <mc:Choice Requires="a14">
           <p:sp>
             <p:nvSpPr>
               <p:cNvPr id="22" name="文本框 21">
@@ -24434,6 +24462,7 @@
               </a:bodyPr>
               <a:lstStyle/>
               <a:p>
+                <a:pPr/>
                 <a14:m>
                   <m:oMathPara xmlns:m="http://schemas.openxmlformats.org/officeDocument/2006/math">
                     <m:oMathParaPr>
@@ -24598,7 +24627,7 @@
             </p:txBody>
           </p:sp>
         </mc:Choice>
-        <mc:Fallback>
+        <mc:Fallback xmlns="">
           <p:sp>
             <p:nvSpPr>
               <p:cNvPr id="22" name="文本框 21">
@@ -24761,8 +24790,8 @@
           </a:fontRef>
         </p:style>
       </p:cxnSp>
-      <mc:AlternateContent xmlns:mc="http://schemas.openxmlformats.org/markup-compatibility/2006">
-        <mc:Choice xmlns:a14="http://schemas.microsoft.com/office/drawing/2010/main" Requires="a14">
+      <mc:AlternateContent xmlns:mc="http://schemas.openxmlformats.org/markup-compatibility/2006" xmlns:a14="http://schemas.microsoft.com/office/drawing/2010/main">
+        <mc:Choice Requires="a14">
           <p:sp>
             <p:nvSpPr>
               <p:cNvPr id="26" name="文本框 25">
@@ -24791,6 +24820,7 @@
               </a:bodyPr>
               <a:lstStyle/>
               <a:p>
+                <a:pPr/>
                 <a14:m>
                   <m:oMathPara xmlns:m="http://schemas.openxmlformats.org/officeDocument/2006/math">
                     <m:oMathParaPr>
@@ -24989,7 +25019,7 @@
             </p:txBody>
           </p:sp>
         </mc:Choice>
-        <mc:Fallback>
+        <mc:Fallback xmlns="">
           <p:sp>
             <p:nvSpPr>
               <p:cNvPr id="26" name="文本框 25">
@@ -25034,8 +25064,8 @@
           </p:sp>
         </mc:Fallback>
       </mc:AlternateContent>
-      <mc:AlternateContent xmlns:mc="http://schemas.openxmlformats.org/markup-compatibility/2006">
-        <mc:Choice xmlns:a14="http://schemas.microsoft.com/office/drawing/2010/main" Requires="a14">
+      <mc:AlternateContent xmlns:mc="http://schemas.openxmlformats.org/markup-compatibility/2006" xmlns:a14="http://schemas.microsoft.com/office/drawing/2010/main">
+        <mc:Choice Requires="a14">
           <p:sp>
             <p:nvSpPr>
               <p:cNvPr id="27" name="文本框 26">
@@ -25064,6 +25094,7 @@
               </a:bodyPr>
               <a:lstStyle/>
               <a:p>
+                <a:pPr/>
                 <a14:m>
                   <m:oMathPara xmlns:m="http://schemas.openxmlformats.org/officeDocument/2006/math">
                     <m:oMathParaPr>
@@ -25258,7 +25289,7 @@
             </p:txBody>
           </p:sp>
         </mc:Choice>
-        <mc:Fallback>
+        <mc:Fallback xmlns="">
           <p:sp>
             <p:nvSpPr>
               <p:cNvPr id="27" name="文本框 26">
@@ -25303,8 +25334,8 @@
           </p:sp>
         </mc:Fallback>
       </mc:AlternateContent>
-      <mc:AlternateContent xmlns:mc="http://schemas.openxmlformats.org/markup-compatibility/2006">
-        <mc:Choice xmlns:a14="http://schemas.microsoft.com/office/drawing/2010/main" Requires="a14">
+      <mc:AlternateContent xmlns:mc="http://schemas.openxmlformats.org/markup-compatibility/2006" xmlns:a14="http://schemas.microsoft.com/office/drawing/2010/main">
+        <mc:Choice Requires="a14">
           <p:sp>
             <p:nvSpPr>
               <p:cNvPr id="28" name="文本框 27">
@@ -25333,6 +25364,7 @@
               </a:bodyPr>
               <a:lstStyle/>
               <a:p>
+                <a:pPr/>
                 <a14:m>
                   <m:oMathPara xmlns:m="http://schemas.openxmlformats.org/officeDocument/2006/math">
                     <m:oMathParaPr>
@@ -25561,7 +25593,7 @@
             </p:txBody>
           </p:sp>
         </mc:Choice>
-        <mc:Fallback>
+        <mc:Fallback xmlns="">
           <p:sp>
             <p:nvSpPr>
               <p:cNvPr id="28" name="文本框 27">
@@ -25728,8 +25760,8 @@
           </a:fontRef>
         </p:style>
       </p:cxnSp>
-      <mc:AlternateContent xmlns:mc="http://schemas.openxmlformats.org/markup-compatibility/2006">
-        <mc:Choice xmlns:a14="http://schemas.microsoft.com/office/drawing/2010/main" Requires="a14">
+      <mc:AlternateContent xmlns:mc="http://schemas.openxmlformats.org/markup-compatibility/2006" xmlns:a14="http://schemas.microsoft.com/office/drawing/2010/main">
+        <mc:Choice Requires="a14">
           <p:sp>
             <p:nvSpPr>
               <p:cNvPr id="38" name="文本框 37">
@@ -25785,7 +25817,7 @@
             </p:txBody>
           </p:sp>
         </mc:Choice>
-        <mc:Fallback>
+        <mc:Fallback xmlns="">
           <p:sp>
             <p:nvSpPr>
               <p:cNvPr id="38" name="文本框 37">
@@ -25830,8 +25862,8 @@
           </p:sp>
         </mc:Fallback>
       </mc:AlternateContent>
-      <mc:AlternateContent xmlns:mc="http://schemas.openxmlformats.org/markup-compatibility/2006">
-        <mc:Choice xmlns:a14="http://schemas.microsoft.com/office/drawing/2010/main" Requires="a14">
+      <mc:AlternateContent xmlns:mc="http://schemas.openxmlformats.org/markup-compatibility/2006" xmlns:a14="http://schemas.microsoft.com/office/drawing/2010/main">
+        <mc:Choice Requires="a14">
           <p:sp>
             <p:nvSpPr>
               <p:cNvPr id="40" name="文本框 39">
@@ -26025,7 +26057,7 @@
             </p:txBody>
           </p:sp>
         </mc:Choice>
-        <mc:Fallback>
+        <mc:Fallback xmlns="">
           <p:sp>
             <p:nvSpPr>
               <p:cNvPr id="40" name="文本框 39">
@@ -26234,8 +26266,8 @@
           </a:fontRef>
         </p:style>
       </p:cxnSp>
-      <mc:AlternateContent xmlns:mc="http://schemas.openxmlformats.org/markup-compatibility/2006">
-        <mc:Choice xmlns:a14="http://schemas.microsoft.com/office/drawing/2010/main" Requires="a14">
+      <mc:AlternateContent xmlns:mc="http://schemas.openxmlformats.org/markup-compatibility/2006" xmlns:a14="http://schemas.microsoft.com/office/drawing/2010/main">
+        <mc:Choice Requires="a14">
           <p:sp>
             <p:nvSpPr>
               <p:cNvPr id="48" name="文本框 47">
@@ -26291,7 +26323,7 @@
             </p:txBody>
           </p:sp>
         </mc:Choice>
-        <mc:Fallback>
+        <mc:Fallback xmlns="">
           <p:sp>
             <p:nvSpPr>
               <p:cNvPr id="48" name="文本框 47">
@@ -26336,8 +26368,8 @@
           </p:sp>
         </mc:Fallback>
       </mc:AlternateContent>
-      <mc:AlternateContent xmlns:mc="http://schemas.openxmlformats.org/markup-compatibility/2006">
-        <mc:Choice xmlns:a14="http://schemas.microsoft.com/office/drawing/2010/main" Requires="a14">
+      <mc:AlternateContent xmlns:mc="http://schemas.openxmlformats.org/markup-compatibility/2006" xmlns:a14="http://schemas.microsoft.com/office/drawing/2010/main">
+        <mc:Choice Requires="a14">
           <p:sp>
             <p:nvSpPr>
               <p:cNvPr id="50" name="文本框 49">
@@ -26442,7 +26474,7 @@
             </p:txBody>
           </p:sp>
         </mc:Choice>
-        <mc:Fallback>
+        <mc:Fallback xmlns="">
           <p:sp>
             <p:nvSpPr>
               <p:cNvPr id="50" name="文本框 49">
@@ -26613,8 +26645,8 @@
           </a:prstGeom>
         </p:spPr>
       </p:pic>
-      <mc:AlternateContent xmlns:mc="http://schemas.openxmlformats.org/markup-compatibility/2006">
-        <mc:Choice xmlns:a14="http://schemas.microsoft.com/office/drawing/2010/main" Requires="a14">
+      <mc:AlternateContent xmlns:mc="http://schemas.openxmlformats.org/markup-compatibility/2006" xmlns:a14="http://schemas.microsoft.com/office/drawing/2010/main">
+        <mc:Choice Requires="a14">
           <p:sp>
             <p:nvSpPr>
               <p:cNvPr id="6" name="文本框 5">
@@ -26643,6 +26675,7 @@
               </a:bodyPr>
               <a:lstStyle/>
               <a:p>
+                <a:pPr/>
                 <a14:m>
                   <m:oMathPara xmlns:m="http://schemas.openxmlformats.org/officeDocument/2006/math">
                     <m:oMathParaPr>
@@ -26663,7 +26696,7 @@
             </p:txBody>
           </p:sp>
         </mc:Choice>
-        <mc:Fallback>
+        <mc:Fallback xmlns="">
           <p:sp>
             <p:nvSpPr>
               <p:cNvPr id="6" name="文本框 5">
@@ -26825,8 +26858,8 @@
           </a:p>
         </p:txBody>
       </p:sp>
-      <mc:AlternateContent xmlns:mc="http://schemas.openxmlformats.org/markup-compatibility/2006">
-        <mc:Choice xmlns:a14="http://schemas.microsoft.com/office/drawing/2010/main" Requires="a14">
+      <mc:AlternateContent xmlns:mc="http://schemas.openxmlformats.org/markup-compatibility/2006" xmlns:a14="http://schemas.microsoft.com/office/drawing/2010/main">
+        <mc:Choice Requires="a14">
           <p:sp>
             <p:nvSpPr>
               <p:cNvPr id="20" name="文本框 19">
@@ -26994,7 +27027,7 @@
             </p:txBody>
           </p:sp>
         </mc:Choice>
-        <mc:Fallback>
+        <mc:Fallback xmlns="">
           <p:sp>
             <p:nvSpPr>
               <p:cNvPr id="20" name="文本框 19">
@@ -27499,8 +27532,8 @@
           </a:fontRef>
         </p:style>
       </p:cxnSp>
-      <mc:AlternateContent xmlns:mc="http://schemas.openxmlformats.org/markup-compatibility/2006">
-        <mc:Choice xmlns:a14="http://schemas.microsoft.com/office/drawing/2010/main" Requires="a14">
+      <mc:AlternateContent xmlns:mc="http://schemas.openxmlformats.org/markup-compatibility/2006" xmlns:a14="http://schemas.microsoft.com/office/drawing/2010/main">
+        <mc:Choice Requires="a14">
           <p:sp>
             <p:nvSpPr>
               <p:cNvPr id="37" name="文本框 36">
@@ -27668,7 +27701,7 @@
             </p:txBody>
           </p:sp>
         </mc:Choice>
-        <mc:Fallback>
+        <mc:Fallback xmlns="">
           <p:sp>
             <p:nvSpPr>
               <p:cNvPr id="37" name="文本框 36">
@@ -27832,8 +27865,8 @@
           </a:p>
         </p:txBody>
       </p:sp>
-      <mc:AlternateContent xmlns:mc="http://schemas.openxmlformats.org/markup-compatibility/2006">
-        <mc:Choice xmlns:a14="http://schemas.microsoft.com/office/drawing/2010/main" Requires="a14">
+      <mc:AlternateContent xmlns:mc="http://schemas.openxmlformats.org/markup-compatibility/2006" xmlns:a14="http://schemas.microsoft.com/office/drawing/2010/main">
+        <mc:Choice Requires="a14">
           <p:sp>
             <p:nvSpPr>
               <p:cNvPr id="51" name="文本框 50">
@@ -28045,7 +28078,7 @@
             </p:txBody>
           </p:sp>
         </mc:Choice>
-        <mc:Fallback>
+        <mc:Fallback xmlns="">
           <p:sp>
             <p:nvSpPr>
               <p:cNvPr id="51" name="文本框 50">
